--- a/7380 Slides.pptx
+++ b/7380 Slides.pptx
@@ -5,7 +5,7 @@
     <p:sldMasterId id="2147483678" r:id="rId1"/>
   </p:sldMasterIdLst>
   <p:notesMasterIdLst>
-    <p:notesMasterId r:id="rId16"/>
+    <p:notesMasterId r:id="rId17"/>
   </p:notesMasterIdLst>
   <p:sldIdLst>
     <p:sldId id="256" r:id="rId2"/>
@@ -13,39 +13,40 @@
     <p:sldId id="258" r:id="rId4"/>
     <p:sldId id="259" r:id="rId5"/>
     <p:sldId id="260" r:id="rId6"/>
-    <p:sldId id="270" r:id="rId7"/>
-    <p:sldId id="271" r:id="rId8"/>
-    <p:sldId id="263" r:id="rId9"/>
-    <p:sldId id="264" r:id="rId10"/>
-    <p:sldId id="265" r:id="rId11"/>
-    <p:sldId id="266" r:id="rId12"/>
-    <p:sldId id="267" r:id="rId13"/>
-    <p:sldId id="268" r:id="rId14"/>
-    <p:sldId id="269" r:id="rId15"/>
+    <p:sldId id="263" r:id="rId7"/>
+    <p:sldId id="264" r:id="rId8"/>
+    <p:sldId id="265" r:id="rId9"/>
+    <p:sldId id="272" r:id="rId10"/>
+    <p:sldId id="273" r:id="rId11"/>
+    <p:sldId id="274" r:id="rId12"/>
+    <p:sldId id="266" r:id="rId13"/>
+    <p:sldId id="267" r:id="rId14"/>
+    <p:sldId id="268" r:id="rId15"/>
+    <p:sldId id="269" r:id="rId16"/>
   </p:sldIdLst>
   <p:sldSz cx="9144000" cy="5143500" type="screen16x9"/>
   <p:notesSz cx="6858000" cy="9144000"/>
   <p:embeddedFontLst>
     <p:embeddedFont>
       <p:font typeface="DM Sans" pitchFamily="2" charset="0"/>
-      <p:regular r:id="rId17"/>
-      <p:bold r:id="rId18"/>
-      <p:italic r:id="rId19"/>
-      <p:boldItalic r:id="rId20"/>
+      <p:regular r:id="rId18"/>
+      <p:bold r:id="rId19"/>
+      <p:italic r:id="rId20"/>
+      <p:boldItalic r:id="rId21"/>
     </p:embeddedFont>
     <p:embeddedFont>
       <p:font typeface="DM Sans Medium" pitchFamily="2" charset="0"/>
-      <p:regular r:id="rId21"/>
-      <p:bold r:id="rId22"/>
-      <p:italic r:id="rId23"/>
-      <p:boldItalic r:id="rId24"/>
+      <p:regular r:id="rId22"/>
+      <p:bold r:id="rId23"/>
+      <p:italic r:id="rId24"/>
+      <p:boldItalic r:id="rId25"/>
     </p:embeddedFont>
     <p:embeddedFont>
       <p:font typeface="Merriweather" panose="00000500000000000000" pitchFamily="2" charset="0"/>
-      <p:regular r:id="rId25"/>
-      <p:bold r:id="rId26"/>
-      <p:italic r:id="rId27"/>
-      <p:boldItalic r:id="rId28"/>
+      <p:regular r:id="rId26"/>
+      <p:bold r:id="rId27"/>
+      <p:italic r:id="rId28"/>
+      <p:boldItalic r:id="rId29"/>
     </p:embeddedFont>
   </p:embeddedFontLst>
   <p:defaultTextStyle>
@@ -846,7 +847,13 @@
   <p:cSld>
     <p:spTree>
       <p:nvGrpSpPr>
-        <p:cNvPr id="1" name="Shape 295"/>
+        <p:cNvPr id="1" name="Shape 295">
+          <a:extLst>
+            <a:ext uri="{FF2B5EF4-FFF2-40B4-BE49-F238E27FC236}">
+              <a16:creationId xmlns:a16="http://schemas.microsoft.com/office/drawing/2014/main" id="{7F1ED3AB-9842-B1F8-54FA-FFD73479D234}"/>
+            </a:ext>
+          </a:extLst>
+        </p:cNvPr>
         <p:cNvGrpSpPr/>
         <p:nvPr/>
       </p:nvGrpSpPr>
@@ -860,7 +867,13 @@
       </p:grpSpPr>
       <p:sp>
         <p:nvSpPr>
-          <p:cNvPr id="296" name="Google Shape;296;g34073f53f99_1_200:notes"/>
+          <p:cNvPr id="296" name="Google Shape;296;g34073f53f99_1_200:notes">
+            <a:extLst>
+              <a:ext uri="{FF2B5EF4-FFF2-40B4-BE49-F238E27FC236}">
+                <a16:creationId xmlns:a16="http://schemas.microsoft.com/office/drawing/2014/main" id="{8C9A20E3-C0EE-1000-C526-7E9FA7127F01}"/>
+              </a:ext>
+            </a:extLst>
+          </p:cNvPr>
           <p:cNvSpPr>
             <a:spLocks noGrp="1" noRot="1" noChangeAspect="1"/>
           </p:cNvSpPr>
@@ -901,7 +914,13 @@
       </p:sp>
       <p:sp>
         <p:nvSpPr>
-          <p:cNvPr id="297" name="Google Shape;297;g34073f53f99_1_200:notes"/>
+          <p:cNvPr id="297" name="Google Shape;297;g34073f53f99_1_200:notes">
+            <a:extLst>
+              <a:ext uri="{FF2B5EF4-FFF2-40B4-BE49-F238E27FC236}">
+                <a16:creationId xmlns:a16="http://schemas.microsoft.com/office/drawing/2014/main" id="{5A5C1E7C-1E03-AA48-D17B-06D1AE666613}"/>
+              </a:ext>
+            </a:extLst>
+          </p:cNvPr>
           <p:cNvSpPr txBox="1">
             <a:spLocks noGrp="1"/>
           </p:cNvSpPr>
@@ -938,6 +957,11 @@
         </p:txBody>
       </p:sp>
     </p:spTree>
+    <p:extLst>
+      <p:ext uri="{BB962C8B-B14F-4D97-AF65-F5344CB8AC3E}">
+        <p14:creationId xmlns:p14="http://schemas.microsoft.com/office/powerpoint/2010/main" val="1274167698"/>
+      </p:ext>
+    </p:extLst>
   </p:cSld>
   <p:clrMapOvr>
     <a:masterClrMapping/>
@@ -946,6 +970,133 @@
 </file>
 
 <file path=ppt/notesSlides/notesSlide11.xml><?xml version="1.0" encoding="utf-8"?>
+<p:notes xmlns:a="http://schemas.openxmlformats.org/drawingml/2006/main" xmlns:r="http://schemas.openxmlformats.org/officeDocument/2006/relationships" xmlns:p="http://schemas.openxmlformats.org/presentationml/2006/main" showMasterSp="0" showMasterPhAnim="0">
+  <p:cSld>
+    <p:spTree>
+      <p:nvGrpSpPr>
+        <p:cNvPr id="1" name="Shape 295">
+          <a:extLst>
+            <a:ext uri="{FF2B5EF4-FFF2-40B4-BE49-F238E27FC236}">
+              <a16:creationId xmlns:a16="http://schemas.microsoft.com/office/drawing/2014/main" id="{988190D9-4060-AFE0-32C4-9EA97A691CB9}"/>
+            </a:ext>
+          </a:extLst>
+        </p:cNvPr>
+        <p:cNvGrpSpPr/>
+        <p:nvPr/>
+      </p:nvGrpSpPr>
+      <p:grpSpPr>
+        <a:xfrm>
+          <a:off x="0" y="0"/>
+          <a:ext cx="0" cy="0"/>
+          <a:chOff x="0" y="0"/>
+          <a:chExt cx="0" cy="0"/>
+        </a:xfrm>
+      </p:grpSpPr>
+      <p:sp>
+        <p:nvSpPr>
+          <p:cNvPr id="296" name="Google Shape;296;g34073f53f99_1_200:notes">
+            <a:extLst>
+              <a:ext uri="{FF2B5EF4-FFF2-40B4-BE49-F238E27FC236}">
+                <a16:creationId xmlns:a16="http://schemas.microsoft.com/office/drawing/2014/main" id="{27873112-F9FD-BE32-5272-C20B100BF5B5}"/>
+              </a:ext>
+            </a:extLst>
+          </p:cNvPr>
+          <p:cNvSpPr>
+            <a:spLocks noGrp="1" noRot="1" noChangeAspect="1"/>
+          </p:cNvSpPr>
+          <p:nvPr>
+            <p:ph type="sldImg" idx="2"/>
+          </p:nvPr>
+        </p:nvSpPr>
+        <p:spPr>
+          <a:xfrm>
+            <a:off x="381000" y="685800"/>
+            <a:ext cx="6096000" cy="3429000"/>
+          </a:xfrm>
+          <a:custGeom>
+            <a:avLst/>
+            <a:gdLst/>
+            <a:ahLst/>
+            <a:cxnLst/>
+            <a:rect l="l" t="t" r="r" b="b"/>
+            <a:pathLst>
+              <a:path w="120000" h="120000" extrusionOk="0">
+                <a:moveTo>
+                  <a:pt x="0" y="0"/>
+                </a:moveTo>
+                <a:lnTo>
+                  <a:pt x="120000" y="0"/>
+                </a:lnTo>
+                <a:lnTo>
+                  <a:pt x="120000" y="120000"/>
+                </a:lnTo>
+                <a:lnTo>
+                  <a:pt x="0" y="120000"/>
+                </a:lnTo>
+                <a:close/>
+              </a:path>
+            </a:pathLst>
+          </a:custGeom>
+        </p:spPr>
+      </p:sp>
+      <p:sp>
+        <p:nvSpPr>
+          <p:cNvPr id="297" name="Google Shape;297;g34073f53f99_1_200:notes">
+            <a:extLst>
+              <a:ext uri="{FF2B5EF4-FFF2-40B4-BE49-F238E27FC236}">
+                <a16:creationId xmlns:a16="http://schemas.microsoft.com/office/drawing/2014/main" id="{B7C45506-3173-6162-DCD6-5D3EFAB4467F}"/>
+              </a:ext>
+            </a:extLst>
+          </p:cNvPr>
+          <p:cNvSpPr txBox="1">
+            <a:spLocks noGrp="1"/>
+          </p:cNvSpPr>
+          <p:nvPr>
+            <p:ph type="body" idx="1"/>
+          </p:nvPr>
+        </p:nvSpPr>
+        <p:spPr>
+          <a:xfrm>
+            <a:off x="685800" y="4343400"/>
+            <a:ext cx="5486400" cy="4114800"/>
+          </a:xfrm>
+          <a:prstGeom prst="rect">
+            <a:avLst/>
+          </a:prstGeom>
+        </p:spPr>
+        <p:txBody>
+          <a:bodyPr spcFirstLastPara="1" wrap="square" lIns="91425" tIns="91425" rIns="91425" bIns="91425" anchor="t" anchorCtr="0">
+            <a:noAutofit/>
+          </a:bodyPr>
+          <a:lstStyle/>
+          <a:p>
+            <a:pPr marL="0" lvl="0" indent="0" algn="l" rtl="0">
+              <a:spcBef>
+                <a:spcPts val="0"/>
+              </a:spcBef>
+              <a:spcAft>
+                <a:spcPts val="0"/>
+              </a:spcAft>
+              <a:buNone/>
+            </a:pPr>
+            <a:endParaRPr/>
+          </a:p>
+        </p:txBody>
+      </p:sp>
+    </p:spTree>
+    <p:extLst>
+      <p:ext uri="{BB962C8B-B14F-4D97-AF65-F5344CB8AC3E}">
+        <p14:creationId xmlns:p14="http://schemas.microsoft.com/office/powerpoint/2010/main" val="2854919485"/>
+      </p:ext>
+    </p:extLst>
+  </p:cSld>
+  <p:clrMapOvr>
+    <a:masterClrMapping/>
+  </p:clrMapOvr>
+</p:notes>
+</file>
+
+<file path=ppt/notesSlides/notesSlide12.xml><?xml version="1.0" encoding="utf-8"?>
 <p:notes xmlns:a="http://schemas.openxmlformats.org/drawingml/2006/main" xmlns:r="http://schemas.openxmlformats.org/officeDocument/2006/relationships" xmlns:p="http://schemas.openxmlformats.org/presentationml/2006/main" showMasterSp="0" showMasterPhAnim="0">
   <p:cSld>
     <p:spTree>
@@ -1049,7 +1200,7 @@
 </p:notes>
 </file>
 
-<file path=ppt/notesSlides/notesSlide12.xml><?xml version="1.0" encoding="utf-8"?>
+<file path=ppt/notesSlides/notesSlide13.xml><?xml version="1.0" encoding="utf-8"?>
 <p:notes xmlns:a="http://schemas.openxmlformats.org/drawingml/2006/main" xmlns:r="http://schemas.openxmlformats.org/officeDocument/2006/relationships" xmlns:p="http://schemas.openxmlformats.org/presentationml/2006/main" showMasterSp="0" showMasterPhAnim="0">
   <p:cSld>
     <p:spTree>
@@ -1153,7 +1304,7 @@
 </p:notes>
 </file>
 
-<file path=ppt/notesSlides/notesSlide13.xml><?xml version="1.0" encoding="utf-8"?>
+<file path=ppt/notesSlides/notesSlide14.xml><?xml version="1.0" encoding="utf-8"?>
 <p:notes xmlns:a="http://schemas.openxmlformats.org/drawingml/2006/main" xmlns:r="http://schemas.openxmlformats.org/officeDocument/2006/relationships" xmlns:p="http://schemas.openxmlformats.org/presentationml/2006/main" showMasterSp="0" showMasterPhAnim="0">
   <p:cSld>
     <p:spTree>
@@ -1257,7 +1408,7 @@
 </p:notes>
 </file>
 
-<file path=ppt/notesSlides/notesSlide14.xml><?xml version="1.0" encoding="utf-8"?>
+<file path=ppt/notesSlides/notesSlide15.xml><?xml version="1.0" encoding="utf-8"?>
 <p:notes xmlns:a="http://schemas.openxmlformats.org/drawingml/2006/main" xmlns:r="http://schemas.openxmlformats.org/officeDocument/2006/relationships" xmlns:p="http://schemas.openxmlformats.org/presentationml/2006/main" showMasterSp="0" showMasterPhAnim="0">
   <p:cSld>
     <p:spTree>
@@ -1782,260 +1933,6 @@
   <p:cSld>
     <p:spTree>
       <p:nvGrpSpPr>
-        <p:cNvPr id="1" name="Shape 253">
-          <a:extLst>
-            <a:ext uri="{FF2B5EF4-FFF2-40B4-BE49-F238E27FC236}">
-              <a16:creationId xmlns:a16="http://schemas.microsoft.com/office/drawing/2014/main" id="{99AF85A4-6646-E827-6A1A-C40B6A1C1DF3}"/>
-            </a:ext>
-          </a:extLst>
-        </p:cNvPr>
-        <p:cNvGrpSpPr/>
-        <p:nvPr/>
-      </p:nvGrpSpPr>
-      <p:grpSpPr>
-        <a:xfrm>
-          <a:off x="0" y="0"/>
-          <a:ext cx="0" cy="0"/>
-          <a:chOff x="0" y="0"/>
-          <a:chExt cx="0" cy="0"/>
-        </a:xfrm>
-      </p:grpSpPr>
-      <p:sp>
-        <p:nvSpPr>
-          <p:cNvPr id="254" name="Google Shape;254;g34073f53f99_1_94:notes">
-            <a:extLst>
-              <a:ext uri="{FF2B5EF4-FFF2-40B4-BE49-F238E27FC236}">
-                <a16:creationId xmlns:a16="http://schemas.microsoft.com/office/drawing/2014/main" id="{BD3077AA-63AD-91AE-2BF1-E4121479D6CA}"/>
-              </a:ext>
-            </a:extLst>
-          </p:cNvPr>
-          <p:cNvSpPr>
-            <a:spLocks noGrp="1" noRot="1" noChangeAspect="1"/>
-          </p:cNvSpPr>
-          <p:nvPr>
-            <p:ph type="sldImg" idx="2"/>
-          </p:nvPr>
-        </p:nvSpPr>
-        <p:spPr>
-          <a:xfrm>
-            <a:off x="381000" y="685800"/>
-            <a:ext cx="6096000" cy="3429000"/>
-          </a:xfrm>
-          <a:custGeom>
-            <a:avLst/>
-            <a:gdLst/>
-            <a:ahLst/>
-            <a:cxnLst/>
-            <a:rect l="l" t="t" r="r" b="b"/>
-            <a:pathLst>
-              <a:path w="120000" h="120000" extrusionOk="0">
-                <a:moveTo>
-                  <a:pt x="0" y="0"/>
-                </a:moveTo>
-                <a:lnTo>
-                  <a:pt x="120000" y="0"/>
-                </a:lnTo>
-                <a:lnTo>
-                  <a:pt x="120000" y="120000"/>
-                </a:lnTo>
-                <a:lnTo>
-                  <a:pt x="0" y="120000"/>
-                </a:lnTo>
-                <a:close/>
-              </a:path>
-            </a:pathLst>
-          </a:custGeom>
-        </p:spPr>
-      </p:sp>
-      <p:sp>
-        <p:nvSpPr>
-          <p:cNvPr id="255" name="Google Shape;255;g34073f53f99_1_94:notes">
-            <a:extLst>
-              <a:ext uri="{FF2B5EF4-FFF2-40B4-BE49-F238E27FC236}">
-                <a16:creationId xmlns:a16="http://schemas.microsoft.com/office/drawing/2014/main" id="{89DD83A0-C7D8-1FC5-8B5A-53512827A2FD}"/>
-              </a:ext>
-            </a:extLst>
-          </p:cNvPr>
-          <p:cNvSpPr txBox="1">
-            <a:spLocks noGrp="1"/>
-          </p:cNvSpPr>
-          <p:nvPr>
-            <p:ph type="body" idx="1"/>
-          </p:nvPr>
-        </p:nvSpPr>
-        <p:spPr>
-          <a:xfrm>
-            <a:off x="685800" y="4343400"/>
-            <a:ext cx="5486400" cy="4114800"/>
-          </a:xfrm>
-          <a:prstGeom prst="rect">
-            <a:avLst/>
-          </a:prstGeom>
-        </p:spPr>
-        <p:txBody>
-          <a:bodyPr spcFirstLastPara="1" wrap="square" lIns="91425" tIns="91425" rIns="91425" bIns="91425" anchor="t" anchorCtr="0">
-            <a:noAutofit/>
-          </a:bodyPr>
-          <a:lstStyle/>
-          <a:p>
-            <a:pPr marL="0" lvl="0" indent="0" algn="l" rtl="0">
-              <a:spcBef>
-                <a:spcPts val="0"/>
-              </a:spcBef>
-              <a:spcAft>
-                <a:spcPts val="0"/>
-              </a:spcAft>
-              <a:buNone/>
-            </a:pPr>
-            <a:endParaRPr/>
-          </a:p>
-        </p:txBody>
-      </p:sp>
-    </p:spTree>
-    <p:extLst>
-      <p:ext uri="{BB962C8B-B14F-4D97-AF65-F5344CB8AC3E}">
-        <p14:creationId xmlns:p14="http://schemas.microsoft.com/office/powerpoint/2010/main" val="1974677324"/>
-      </p:ext>
-    </p:extLst>
-  </p:cSld>
-  <p:clrMapOvr>
-    <a:masterClrMapping/>
-  </p:clrMapOvr>
-</p:notes>
-</file>
-
-<file path=ppt/notesSlides/notesSlide7.xml><?xml version="1.0" encoding="utf-8"?>
-<p:notes xmlns:a="http://schemas.openxmlformats.org/drawingml/2006/main" xmlns:r="http://schemas.openxmlformats.org/officeDocument/2006/relationships" xmlns:p="http://schemas.openxmlformats.org/presentationml/2006/main" showMasterSp="0" showMasterPhAnim="0">
-  <p:cSld>
-    <p:spTree>
-      <p:nvGrpSpPr>
-        <p:cNvPr id="1" name="Shape 253">
-          <a:extLst>
-            <a:ext uri="{FF2B5EF4-FFF2-40B4-BE49-F238E27FC236}">
-              <a16:creationId xmlns:a16="http://schemas.microsoft.com/office/drawing/2014/main" id="{CFC037E3-02F5-F29A-4460-18BE3EF2BE73}"/>
-            </a:ext>
-          </a:extLst>
-        </p:cNvPr>
-        <p:cNvGrpSpPr/>
-        <p:nvPr/>
-      </p:nvGrpSpPr>
-      <p:grpSpPr>
-        <a:xfrm>
-          <a:off x="0" y="0"/>
-          <a:ext cx="0" cy="0"/>
-          <a:chOff x="0" y="0"/>
-          <a:chExt cx="0" cy="0"/>
-        </a:xfrm>
-      </p:grpSpPr>
-      <p:sp>
-        <p:nvSpPr>
-          <p:cNvPr id="254" name="Google Shape;254;g34073f53f99_1_94:notes">
-            <a:extLst>
-              <a:ext uri="{FF2B5EF4-FFF2-40B4-BE49-F238E27FC236}">
-                <a16:creationId xmlns:a16="http://schemas.microsoft.com/office/drawing/2014/main" id="{DD1DF3F8-0E57-BCAE-F343-D196FB15E4CC}"/>
-              </a:ext>
-            </a:extLst>
-          </p:cNvPr>
-          <p:cNvSpPr>
-            <a:spLocks noGrp="1" noRot="1" noChangeAspect="1"/>
-          </p:cNvSpPr>
-          <p:nvPr>
-            <p:ph type="sldImg" idx="2"/>
-          </p:nvPr>
-        </p:nvSpPr>
-        <p:spPr>
-          <a:xfrm>
-            <a:off x="381000" y="685800"/>
-            <a:ext cx="6096000" cy="3429000"/>
-          </a:xfrm>
-          <a:custGeom>
-            <a:avLst/>
-            <a:gdLst/>
-            <a:ahLst/>
-            <a:cxnLst/>
-            <a:rect l="l" t="t" r="r" b="b"/>
-            <a:pathLst>
-              <a:path w="120000" h="120000" extrusionOk="0">
-                <a:moveTo>
-                  <a:pt x="0" y="0"/>
-                </a:moveTo>
-                <a:lnTo>
-                  <a:pt x="120000" y="0"/>
-                </a:lnTo>
-                <a:lnTo>
-                  <a:pt x="120000" y="120000"/>
-                </a:lnTo>
-                <a:lnTo>
-                  <a:pt x="0" y="120000"/>
-                </a:lnTo>
-                <a:close/>
-              </a:path>
-            </a:pathLst>
-          </a:custGeom>
-        </p:spPr>
-      </p:sp>
-      <p:sp>
-        <p:nvSpPr>
-          <p:cNvPr id="255" name="Google Shape;255;g34073f53f99_1_94:notes">
-            <a:extLst>
-              <a:ext uri="{FF2B5EF4-FFF2-40B4-BE49-F238E27FC236}">
-                <a16:creationId xmlns:a16="http://schemas.microsoft.com/office/drawing/2014/main" id="{FA67BFC5-73AD-7DFD-0B40-E60ACD02DE65}"/>
-              </a:ext>
-            </a:extLst>
-          </p:cNvPr>
-          <p:cNvSpPr txBox="1">
-            <a:spLocks noGrp="1"/>
-          </p:cNvSpPr>
-          <p:nvPr>
-            <p:ph type="body" idx="1"/>
-          </p:nvPr>
-        </p:nvSpPr>
-        <p:spPr>
-          <a:xfrm>
-            <a:off x="685800" y="4343400"/>
-            <a:ext cx="5486400" cy="4114800"/>
-          </a:xfrm>
-          <a:prstGeom prst="rect">
-            <a:avLst/>
-          </a:prstGeom>
-        </p:spPr>
-        <p:txBody>
-          <a:bodyPr spcFirstLastPara="1" wrap="square" lIns="91425" tIns="91425" rIns="91425" bIns="91425" anchor="t" anchorCtr="0">
-            <a:noAutofit/>
-          </a:bodyPr>
-          <a:lstStyle/>
-          <a:p>
-            <a:pPr marL="0" lvl="0" indent="0" algn="l" rtl="0">
-              <a:spcBef>
-                <a:spcPts val="0"/>
-              </a:spcBef>
-              <a:spcAft>
-                <a:spcPts val="0"/>
-              </a:spcAft>
-              <a:buNone/>
-            </a:pPr>
-            <a:endParaRPr/>
-          </a:p>
-        </p:txBody>
-      </p:sp>
-    </p:spTree>
-    <p:extLst>
-      <p:ext uri="{BB962C8B-B14F-4D97-AF65-F5344CB8AC3E}">
-        <p14:creationId xmlns:p14="http://schemas.microsoft.com/office/powerpoint/2010/main" val="2094568285"/>
-      </p:ext>
-    </p:extLst>
-  </p:cSld>
-  <p:clrMapOvr>
-    <a:masterClrMapping/>
-  </p:clrMapOvr>
-</p:notes>
-</file>
-
-<file path=ppt/notesSlides/notesSlide8.xml><?xml version="1.0" encoding="utf-8"?>
-<p:notes xmlns:a="http://schemas.openxmlformats.org/drawingml/2006/main" xmlns:r="http://schemas.openxmlformats.org/officeDocument/2006/relationships" xmlns:p="http://schemas.openxmlformats.org/presentationml/2006/main" showMasterSp="0" showMasterPhAnim="0">
-  <p:cSld>
-    <p:spTree>
-      <p:nvGrpSpPr>
         <p:cNvPr id="1" name="Shape 279"/>
         <p:cNvGrpSpPr/>
         <p:nvPr/>
@@ -2135,7 +2032,7 @@
 </p:notes>
 </file>
 
-<file path=ppt/notesSlides/notesSlide9.xml><?xml version="1.0" encoding="utf-8"?>
+<file path=ppt/notesSlides/notesSlide7.xml><?xml version="1.0" encoding="utf-8"?>
 <p:notes xmlns:a="http://schemas.openxmlformats.org/drawingml/2006/main" xmlns:r="http://schemas.openxmlformats.org/officeDocument/2006/relationships" xmlns:p="http://schemas.openxmlformats.org/presentationml/2006/main" showMasterSp="0" showMasterPhAnim="0">
   <p:cSld>
     <p:spTree>
@@ -2232,6 +2129,237 @@
         </p:txBody>
       </p:sp>
     </p:spTree>
+  </p:cSld>
+  <p:clrMapOvr>
+    <a:masterClrMapping/>
+  </p:clrMapOvr>
+</p:notes>
+</file>
+
+<file path=ppt/notesSlides/notesSlide8.xml><?xml version="1.0" encoding="utf-8"?>
+<p:notes xmlns:a="http://schemas.openxmlformats.org/drawingml/2006/main" xmlns:r="http://schemas.openxmlformats.org/officeDocument/2006/relationships" xmlns:p="http://schemas.openxmlformats.org/presentationml/2006/main" showMasterSp="0" showMasterPhAnim="0">
+  <p:cSld>
+    <p:spTree>
+      <p:nvGrpSpPr>
+        <p:cNvPr id="1" name="Shape 295"/>
+        <p:cNvGrpSpPr/>
+        <p:nvPr/>
+      </p:nvGrpSpPr>
+      <p:grpSpPr>
+        <a:xfrm>
+          <a:off x="0" y="0"/>
+          <a:ext cx="0" cy="0"/>
+          <a:chOff x="0" y="0"/>
+          <a:chExt cx="0" cy="0"/>
+        </a:xfrm>
+      </p:grpSpPr>
+      <p:sp>
+        <p:nvSpPr>
+          <p:cNvPr id="296" name="Google Shape;296;g34073f53f99_1_200:notes"/>
+          <p:cNvSpPr>
+            <a:spLocks noGrp="1" noRot="1" noChangeAspect="1"/>
+          </p:cNvSpPr>
+          <p:nvPr>
+            <p:ph type="sldImg" idx="2"/>
+          </p:nvPr>
+        </p:nvSpPr>
+        <p:spPr>
+          <a:xfrm>
+            <a:off x="381000" y="685800"/>
+            <a:ext cx="6096000" cy="3429000"/>
+          </a:xfrm>
+          <a:custGeom>
+            <a:avLst/>
+            <a:gdLst/>
+            <a:ahLst/>
+            <a:cxnLst/>
+            <a:rect l="l" t="t" r="r" b="b"/>
+            <a:pathLst>
+              <a:path w="120000" h="120000" extrusionOk="0">
+                <a:moveTo>
+                  <a:pt x="0" y="0"/>
+                </a:moveTo>
+                <a:lnTo>
+                  <a:pt x="120000" y="0"/>
+                </a:lnTo>
+                <a:lnTo>
+                  <a:pt x="120000" y="120000"/>
+                </a:lnTo>
+                <a:lnTo>
+                  <a:pt x="0" y="120000"/>
+                </a:lnTo>
+                <a:close/>
+              </a:path>
+            </a:pathLst>
+          </a:custGeom>
+        </p:spPr>
+      </p:sp>
+      <p:sp>
+        <p:nvSpPr>
+          <p:cNvPr id="297" name="Google Shape;297;g34073f53f99_1_200:notes"/>
+          <p:cNvSpPr txBox="1">
+            <a:spLocks noGrp="1"/>
+          </p:cNvSpPr>
+          <p:nvPr>
+            <p:ph type="body" idx="1"/>
+          </p:nvPr>
+        </p:nvSpPr>
+        <p:spPr>
+          <a:xfrm>
+            <a:off x="685800" y="4343400"/>
+            <a:ext cx="5486400" cy="4114800"/>
+          </a:xfrm>
+          <a:prstGeom prst="rect">
+            <a:avLst/>
+          </a:prstGeom>
+        </p:spPr>
+        <p:txBody>
+          <a:bodyPr spcFirstLastPara="1" wrap="square" lIns="91425" tIns="91425" rIns="91425" bIns="91425" anchor="t" anchorCtr="0">
+            <a:noAutofit/>
+          </a:bodyPr>
+          <a:lstStyle/>
+          <a:p>
+            <a:pPr marL="0" lvl="0" indent="0" algn="l" rtl="0">
+              <a:spcBef>
+                <a:spcPts val="0"/>
+              </a:spcBef>
+              <a:spcAft>
+                <a:spcPts val="0"/>
+              </a:spcAft>
+              <a:buNone/>
+            </a:pPr>
+            <a:endParaRPr/>
+          </a:p>
+        </p:txBody>
+      </p:sp>
+    </p:spTree>
+  </p:cSld>
+  <p:clrMapOvr>
+    <a:masterClrMapping/>
+  </p:clrMapOvr>
+</p:notes>
+</file>
+
+<file path=ppt/notesSlides/notesSlide9.xml><?xml version="1.0" encoding="utf-8"?>
+<p:notes xmlns:a="http://schemas.openxmlformats.org/drawingml/2006/main" xmlns:r="http://schemas.openxmlformats.org/officeDocument/2006/relationships" xmlns:p="http://schemas.openxmlformats.org/presentationml/2006/main" showMasterSp="0" showMasterPhAnim="0">
+  <p:cSld>
+    <p:spTree>
+      <p:nvGrpSpPr>
+        <p:cNvPr id="1" name="Shape 295">
+          <a:extLst>
+            <a:ext uri="{FF2B5EF4-FFF2-40B4-BE49-F238E27FC236}">
+              <a16:creationId xmlns:a16="http://schemas.microsoft.com/office/drawing/2014/main" id="{82ACDCE9-E61B-7C6C-E07F-9C8339914D6F}"/>
+            </a:ext>
+          </a:extLst>
+        </p:cNvPr>
+        <p:cNvGrpSpPr/>
+        <p:nvPr/>
+      </p:nvGrpSpPr>
+      <p:grpSpPr>
+        <a:xfrm>
+          <a:off x="0" y="0"/>
+          <a:ext cx="0" cy="0"/>
+          <a:chOff x="0" y="0"/>
+          <a:chExt cx="0" cy="0"/>
+        </a:xfrm>
+      </p:grpSpPr>
+      <p:sp>
+        <p:nvSpPr>
+          <p:cNvPr id="296" name="Google Shape;296;g34073f53f99_1_200:notes">
+            <a:extLst>
+              <a:ext uri="{FF2B5EF4-FFF2-40B4-BE49-F238E27FC236}">
+                <a16:creationId xmlns:a16="http://schemas.microsoft.com/office/drawing/2014/main" id="{E8EFE1C7-1031-514A-95B7-235C6480FDA0}"/>
+              </a:ext>
+            </a:extLst>
+          </p:cNvPr>
+          <p:cNvSpPr>
+            <a:spLocks noGrp="1" noRot="1" noChangeAspect="1"/>
+          </p:cNvSpPr>
+          <p:nvPr>
+            <p:ph type="sldImg" idx="2"/>
+          </p:nvPr>
+        </p:nvSpPr>
+        <p:spPr>
+          <a:xfrm>
+            <a:off x="381000" y="685800"/>
+            <a:ext cx="6096000" cy="3429000"/>
+          </a:xfrm>
+          <a:custGeom>
+            <a:avLst/>
+            <a:gdLst/>
+            <a:ahLst/>
+            <a:cxnLst/>
+            <a:rect l="l" t="t" r="r" b="b"/>
+            <a:pathLst>
+              <a:path w="120000" h="120000" extrusionOk="0">
+                <a:moveTo>
+                  <a:pt x="0" y="0"/>
+                </a:moveTo>
+                <a:lnTo>
+                  <a:pt x="120000" y="0"/>
+                </a:lnTo>
+                <a:lnTo>
+                  <a:pt x="120000" y="120000"/>
+                </a:lnTo>
+                <a:lnTo>
+                  <a:pt x="0" y="120000"/>
+                </a:lnTo>
+                <a:close/>
+              </a:path>
+            </a:pathLst>
+          </a:custGeom>
+        </p:spPr>
+      </p:sp>
+      <p:sp>
+        <p:nvSpPr>
+          <p:cNvPr id="297" name="Google Shape;297;g34073f53f99_1_200:notes">
+            <a:extLst>
+              <a:ext uri="{FF2B5EF4-FFF2-40B4-BE49-F238E27FC236}">
+                <a16:creationId xmlns:a16="http://schemas.microsoft.com/office/drawing/2014/main" id="{DD65BC7A-2302-FEEB-8235-7285F82D5917}"/>
+              </a:ext>
+            </a:extLst>
+          </p:cNvPr>
+          <p:cNvSpPr txBox="1">
+            <a:spLocks noGrp="1"/>
+          </p:cNvSpPr>
+          <p:nvPr>
+            <p:ph type="body" idx="1"/>
+          </p:nvPr>
+        </p:nvSpPr>
+        <p:spPr>
+          <a:xfrm>
+            <a:off x="685800" y="4343400"/>
+            <a:ext cx="5486400" cy="4114800"/>
+          </a:xfrm>
+          <a:prstGeom prst="rect">
+            <a:avLst/>
+          </a:prstGeom>
+        </p:spPr>
+        <p:txBody>
+          <a:bodyPr spcFirstLastPara="1" wrap="square" lIns="91425" tIns="91425" rIns="91425" bIns="91425" anchor="t" anchorCtr="0">
+            <a:noAutofit/>
+          </a:bodyPr>
+          <a:lstStyle/>
+          <a:p>
+            <a:pPr marL="0" lvl="0" indent="0" algn="l" rtl="0">
+              <a:spcBef>
+                <a:spcPts val="0"/>
+              </a:spcBef>
+              <a:spcAft>
+                <a:spcPts val="0"/>
+              </a:spcAft>
+              <a:buNone/>
+            </a:pPr>
+            <a:endParaRPr/>
+          </a:p>
+        </p:txBody>
+      </p:sp>
+    </p:spTree>
+    <p:extLst>
+      <p:ext uri="{BB962C8B-B14F-4D97-AF65-F5344CB8AC3E}">
+        <p14:creationId xmlns:p14="http://schemas.microsoft.com/office/powerpoint/2010/main" val="4095635789"/>
+      </p:ext>
+    </p:extLst>
   </p:cSld>
   <p:clrMapOvr>
     <a:masterClrMapping/>
@@ -26491,11 +26619,17 @@
 </file>
 
 <file path=ppt/slides/slide10.xml><?xml version="1.0" encoding="utf-8"?>
-<p:sld xmlns:a="http://schemas.openxmlformats.org/drawingml/2006/main" xmlns:r="http://schemas.openxmlformats.org/officeDocument/2006/relationships" xmlns:p="http://schemas.openxmlformats.org/presentationml/2006/main" showMasterSp="0">
+<p:sld xmlns:a="http://schemas.openxmlformats.org/drawingml/2006/main" xmlns:r="http://schemas.openxmlformats.org/officeDocument/2006/relationships" xmlns:p="http://schemas.openxmlformats.org/presentationml/2006/main">
   <p:cSld>
     <p:spTree>
       <p:nvGrpSpPr>
-        <p:cNvPr id="1" name="Shape 298"/>
+        <p:cNvPr id="1" name="Shape 298">
+          <a:extLst>
+            <a:ext uri="{FF2B5EF4-FFF2-40B4-BE49-F238E27FC236}">
+              <a16:creationId xmlns:a16="http://schemas.microsoft.com/office/drawing/2014/main" id="{D4BD9CCB-F9BD-755D-4B5E-2CAA8A1CD1C7}"/>
+            </a:ext>
+          </a:extLst>
+        </p:cNvPr>
         <p:cNvGrpSpPr/>
         <p:nvPr/>
       </p:nvGrpSpPr>
@@ -26509,7 +26643,13 @@
       </p:grpSpPr>
       <p:sp>
         <p:nvSpPr>
-          <p:cNvPr id="299" name="Google Shape;299;p41"/>
+          <p:cNvPr id="299" name="Google Shape;299;p41">
+            <a:extLst>
+              <a:ext uri="{FF2B5EF4-FFF2-40B4-BE49-F238E27FC236}">
+                <a16:creationId xmlns:a16="http://schemas.microsoft.com/office/drawing/2014/main" id="{9D30FF2E-217B-B4CC-D6D6-2A9AC628D63D}"/>
+              </a:ext>
+            </a:extLst>
+          </p:cNvPr>
           <p:cNvSpPr txBox="1">
             <a:spLocks noGrp="1"/>
           </p:cNvSpPr>
@@ -26551,7 +26691,13 @@
       </p:sp>
       <p:sp>
         <p:nvSpPr>
-          <p:cNvPr id="300" name="Google Shape;300;p41"/>
+          <p:cNvPr id="300" name="Google Shape;300;p41">
+            <a:extLst>
+              <a:ext uri="{FF2B5EF4-FFF2-40B4-BE49-F238E27FC236}">
+                <a16:creationId xmlns:a16="http://schemas.microsoft.com/office/drawing/2014/main" id="{6CD0107A-DB96-90BB-C557-59708C564619}"/>
+              </a:ext>
+            </a:extLst>
+          </p:cNvPr>
           <p:cNvSpPr txBox="1">
             <a:spLocks noGrp="1"/>
           </p:cNvSpPr>
@@ -26593,7 +26739,13 @@
       </p:sp>
       <p:sp>
         <p:nvSpPr>
-          <p:cNvPr id="301" name="Google Shape;301;p41"/>
+          <p:cNvPr id="301" name="Google Shape;301;p41">
+            <a:extLst>
+              <a:ext uri="{FF2B5EF4-FFF2-40B4-BE49-F238E27FC236}">
+                <a16:creationId xmlns:a16="http://schemas.microsoft.com/office/drawing/2014/main" id="{D4C35E34-78A8-9497-423A-6E1F708AF900}"/>
+              </a:ext>
+            </a:extLst>
+          </p:cNvPr>
           <p:cNvSpPr txBox="1"/>
           <p:nvPr/>
         </p:nvSpPr>
@@ -26626,7 +26778,7 @@
               <a:buNone/>
             </a:pPr>
             <a:r>
-              <a:rPr lang="en" sz="2250" b="1">
+              <a:rPr lang="en" sz="2250" b="1" dirty="0">
                 <a:solidFill>
                   <a:schemeClr val="dk1"/>
                 </a:solidFill>
@@ -26635,9 +26787,33 @@
                 <a:cs typeface="Merriweather"/>
                 <a:sym typeface="Merriweather"/>
               </a:rPr>
-              <a:t>Model Interpretation（Machine Learning）</a:t>
+              <a:t>Model Interpretation（</a:t>
             </a:r>
-            <a:endParaRPr sz="3650" b="1">
+            <a:r>
+              <a:rPr lang="en-US" sz="2250" b="1" dirty="0">
+                <a:solidFill>
+                  <a:schemeClr val="dk1"/>
+                </a:solidFill>
+                <a:latin typeface="Merriweather"/>
+                <a:ea typeface="Merriweather"/>
+                <a:cs typeface="Merriweather"/>
+                <a:sym typeface="Merriweather"/>
+              </a:rPr>
+              <a:t>Ensemble models</a:t>
+            </a:r>
+            <a:r>
+              <a:rPr lang="en" sz="2250" b="1" dirty="0">
+                <a:solidFill>
+                  <a:schemeClr val="dk1"/>
+                </a:solidFill>
+                <a:latin typeface="Merriweather"/>
+                <a:ea typeface="Merriweather"/>
+                <a:cs typeface="Merriweather"/>
+                <a:sym typeface="Merriweather"/>
+              </a:rPr>
+              <a:t>）</a:t>
+            </a:r>
+            <a:endParaRPr sz="3650" b="1" dirty="0">
               <a:solidFill>
                 <a:schemeClr val="dk1"/>
               </a:solidFill>
@@ -26651,14 +26827,20 @@
       </p:sp>
       <p:sp>
         <p:nvSpPr>
-          <p:cNvPr id="302" name="Google Shape;302;p41"/>
+          <p:cNvPr id="302" name="Google Shape;302;p41">
+            <a:extLst>
+              <a:ext uri="{FF2B5EF4-FFF2-40B4-BE49-F238E27FC236}">
+                <a16:creationId xmlns:a16="http://schemas.microsoft.com/office/drawing/2014/main" id="{385F8C29-0271-03A2-07C9-081903D58A8C}"/>
+              </a:ext>
+            </a:extLst>
+          </p:cNvPr>
           <p:cNvSpPr txBox="1"/>
           <p:nvPr/>
         </p:nvSpPr>
         <p:spPr>
           <a:xfrm>
-            <a:off x="516425" y="1370275"/>
-            <a:ext cx="6790500" cy="2726400"/>
+            <a:off x="516437" y="1370275"/>
+            <a:ext cx="6793976" cy="2726400"/>
           </a:xfrm>
           <a:prstGeom prst="rect">
             <a:avLst/>
@@ -26687,163 +26869,21 @@
               <a:buNone/>
             </a:pPr>
             <a:r>
-              <a:rPr lang="en" sz="1300" b="1">
+              <a:rPr lang="en-US" sz="1300" b="1" dirty="0">
                 <a:solidFill>
                   <a:schemeClr val="hlink"/>
                 </a:solidFill>
               </a:rPr>
-              <a:t>🔹 Model Performance</a:t>
+              <a:t>🔹 </a:t>
             </a:r>
-            <a:endParaRPr sz="1300" b="1">
-              <a:solidFill>
-                <a:schemeClr val="hlink"/>
-              </a:solidFill>
-            </a:endParaRPr>
-          </a:p>
-          <a:p>
-            <a:pPr marL="457200" lvl="0" indent="-298450" algn="l" rtl="0">
-              <a:lnSpc>
-                <a:spcPct val="115000"/>
-              </a:lnSpc>
-              <a:spcBef>
-                <a:spcPts val="1200"/>
-              </a:spcBef>
-              <a:spcAft>
-                <a:spcPts val="0"/>
-              </a:spcAft>
-              <a:buClr>
-                <a:schemeClr val="hlink"/>
-              </a:buClr>
-              <a:buSzPts val="1100"/>
-              <a:buChar char="●"/>
-            </a:pPr>
             <a:r>
-              <a:rPr lang="en" sz="1100">
+              <a:rPr lang="en-US" altLang="zh-CN" sz="1400" dirty="0">
                 <a:solidFill>
                   <a:schemeClr val="hlink"/>
                 </a:solidFill>
               </a:rPr>
-              <a:t>Removed low-correlation features ( |r| &lt; 0.2)</a:t>
+              <a:t>Ensemble models outperform single classifiers in AUC and AUPR, providing more reliable predictions.</a:t>
             </a:r>
-            <a:br>
-              <a:rPr lang="en" sz="1100">
-                <a:solidFill>
-                  <a:schemeClr val="hlink"/>
-                </a:solidFill>
-              </a:rPr>
-            </a:br>
-            <a:endParaRPr sz="1100">
-              <a:solidFill>
-                <a:schemeClr val="hlink"/>
-              </a:solidFill>
-            </a:endParaRPr>
-          </a:p>
-          <a:p>
-            <a:pPr marL="457200" lvl="0" indent="-298450" algn="l" rtl="0">
-              <a:lnSpc>
-                <a:spcPct val="115000"/>
-              </a:lnSpc>
-              <a:spcBef>
-                <a:spcPts val="0"/>
-              </a:spcBef>
-              <a:spcAft>
-                <a:spcPts val="0"/>
-              </a:spcAft>
-              <a:buClr>
-                <a:schemeClr val="hlink"/>
-              </a:buClr>
-              <a:buSzPts val="1100"/>
-              <a:buChar char="●"/>
-            </a:pPr>
-            <a:r>
-              <a:rPr lang="en" sz="1100">
-                <a:solidFill>
-                  <a:schemeClr val="hlink"/>
-                </a:solidFill>
-              </a:rPr>
-              <a:t>Ensemble models outperform individual ones in both AUC and AUPR</a:t>
-            </a:r>
-            <a:br>
-              <a:rPr lang="en" sz="1100">
-                <a:solidFill>
-                  <a:schemeClr val="hlink"/>
-                </a:solidFill>
-              </a:rPr>
-            </a:br>
-            <a:endParaRPr sz="1100">
-              <a:solidFill>
-                <a:schemeClr val="hlink"/>
-              </a:solidFill>
-            </a:endParaRPr>
-          </a:p>
-          <a:p>
-            <a:pPr marL="457200" lvl="0" indent="-298450" algn="l" rtl="0">
-              <a:lnSpc>
-                <a:spcPct val="115000"/>
-              </a:lnSpc>
-              <a:spcBef>
-                <a:spcPts val="0"/>
-              </a:spcBef>
-              <a:spcAft>
-                <a:spcPts val="0"/>
-              </a:spcAft>
-              <a:buClr>
-                <a:schemeClr val="hlink"/>
-              </a:buClr>
-              <a:buSzPts val="1100"/>
-              <a:buChar char="●"/>
-            </a:pPr>
-            <a:r>
-              <a:rPr lang="en" sz="1100">
-                <a:solidFill>
-                  <a:schemeClr val="hlink"/>
-                </a:solidFill>
-              </a:rPr>
-              <a:t>Stacking improves prediction stability across folds</a:t>
-            </a:r>
-            <a:br>
-              <a:rPr lang="en" sz="1100">
-                <a:solidFill>
-                  <a:schemeClr val="hlink"/>
-                </a:solidFill>
-              </a:rPr>
-            </a:br>
-            <a:endParaRPr sz="1100">
-              <a:solidFill>
-                <a:schemeClr val="hlink"/>
-              </a:solidFill>
-            </a:endParaRPr>
-          </a:p>
-          <a:p>
-            <a:pPr marL="457200" lvl="0" indent="-298450" algn="l" rtl="0">
-              <a:lnSpc>
-                <a:spcPct val="115000"/>
-              </a:lnSpc>
-              <a:spcBef>
-                <a:spcPts val="0"/>
-              </a:spcBef>
-              <a:spcAft>
-                <a:spcPts val="0"/>
-              </a:spcAft>
-              <a:buClr>
-                <a:schemeClr val="hlink"/>
-              </a:buClr>
-              <a:buSzPts val="1100"/>
-              <a:buChar char="●"/>
-            </a:pPr>
-            <a:r>
-              <a:rPr lang="en" sz="1100">
-                <a:solidFill>
-                  <a:schemeClr val="hlink"/>
-                </a:solidFill>
-              </a:rPr>
-              <a:t>SMOTE enhances recall for minority (diabetic) class</a:t>
-            </a:r>
-            <a:endParaRPr sz="1100">
-              <a:solidFill>
-                <a:schemeClr val="hlink"/>
-              </a:solidFill>
-            </a:endParaRPr>
           </a:p>
           <a:p>
             <a:pPr marL="0" lvl="0" indent="0" algn="l" rtl="0">
@@ -26851,14 +26891,14 @@
                 <a:spcPct val="115000"/>
               </a:lnSpc>
               <a:spcBef>
-                <a:spcPts val="1200"/>
-              </a:spcBef>
-              <a:spcAft>
-                <a:spcPts val="1200"/>
+                <a:spcPts val="1400"/>
+              </a:spcBef>
+              <a:spcAft>
+                <a:spcPts val="0"/>
               </a:spcAft>
               <a:buNone/>
             </a:pPr>
-            <a:endParaRPr sz="1300" b="1">
+            <a:endParaRPr lang="en-US" sz="1300" b="1" dirty="0">
               <a:solidFill>
                 <a:schemeClr val="hlink"/>
               </a:solidFill>
@@ -26866,7 +26906,46 @@
           </a:p>
         </p:txBody>
       </p:sp>
+      <p:pic>
+        <p:nvPicPr>
+          <p:cNvPr id="5" name="Google Shape;269;p37">
+            <a:extLst>
+              <a:ext uri="{FF2B5EF4-FFF2-40B4-BE49-F238E27FC236}">
+                <a16:creationId xmlns:a16="http://schemas.microsoft.com/office/drawing/2014/main" id="{DD0DF778-60C6-96D6-BFAF-5AD863EB6C08}"/>
+              </a:ext>
+            </a:extLst>
+          </p:cNvPr>
+          <p:cNvPicPr preferRelativeResize="0"/>
+          <p:nvPr/>
+        </p:nvPicPr>
+        <p:blipFill>
+          <a:blip r:embed="rId3">
+            <a:alphaModFix/>
+          </a:blip>
+          <a:stretch>
+            <a:fillRect/>
+          </a:stretch>
+        </p:blipFill>
+        <p:spPr>
+          <a:xfrm>
+            <a:off x="1751287" y="2194183"/>
+            <a:ext cx="4574000" cy="2665834"/>
+          </a:xfrm>
+          <a:prstGeom prst="rect">
+            <a:avLst/>
+          </a:prstGeom>
+          <a:noFill/>
+          <a:ln>
+            <a:noFill/>
+          </a:ln>
+        </p:spPr>
+      </p:pic>
     </p:spTree>
+    <p:extLst>
+      <p:ext uri="{BB962C8B-B14F-4D97-AF65-F5344CB8AC3E}">
+        <p14:creationId xmlns:p14="http://schemas.microsoft.com/office/powerpoint/2010/main" val="4283803537"/>
+      </p:ext>
+    </p:extLst>
   </p:cSld>
   <p:clrMapOvr>
     <a:masterClrMapping/>
@@ -26875,6 +26954,341 @@
 </file>
 
 <file path=ppt/slides/slide11.xml><?xml version="1.0" encoding="utf-8"?>
+<p:sld xmlns:a="http://schemas.openxmlformats.org/drawingml/2006/main" xmlns:r="http://schemas.openxmlformats.org/officeDocument/2006/relationships" xmlns:p="http://schemas.openxmlformats.org/presentationml/2006/main">
+  <p:cSld>
+    <p:spTree>
+      <p:nvGrpSpPr>
+        <p:cNvPr id="1" name="Shape 298">
+          <a:extLst>
+            <a:ext uri="{FF2B5EF4-FFF2-40B4-BE49-F238E27FC236}">
+              <a16:creationId xmlns:a16="http://schemas.microsoft.com/office/drawing/2014/main" id="{3748EEA2-3F55-CAFF-D032-635AA4A88683}"/>
+            </a:ext>
+          </a:extLst>
+        </p:cNvPr>
+        <p:cNvGrpSpPr/>
+        <p:nvPr/>
+      </p:nvGrpSpPr>
+      <p:grpSpPr>
+        <a:xfrm>
+          <a:off x="0" y="0"/>
+          <a:ext cx="0" cy="0"/>
+          <a:chOff x="0" y="0"/>
+          <a:chExt cx="0" cy="0"/>
+        </a:xfrm>
+      </p:grpSpPr>
+      <p:sp>
+        <p:nvSpPr>
+          <p:cNvPr id="299" name="Google Shape;299;p41">
+            <a:extLst>
+              <a:ext uri="{FF2B5EF4-FFF2-40B4-BE49-F238E27FC236}">
+                <a16:creationId xmlns:a16="http://schemas.microsoft.com/office/drawing/2014/main" id="{95C0B607-490D-3762-C6B9-6A3D21F0D5CD}"/>
+              </a:ext>
+            </a:extLst>
+          </p:cNvPr>
+          <p:cNvSpPr txBox="1">
+            <a:spLocks noGrp="1"/>
+          </p:cNvSpPr>
+          <p:nvPr>
+            <p:ph type="sldNum" idx="12"/>
+          </p:nvPr>
+        </p:nvSpPr>
+        <p:spPr>
+          <a:xfrm>
+            <a:off x="8472458" y="4663217"/>
+            <a:ext cx="548700" cy="393600"/>
+          </a:xfrm>
+          <a:prstGeom prst="rect">
+            <a:avLst/>
+          </a:prstGeom>
+        </p:spPr>
+        <p:txBody>
+          <a:bodyPr spcFirstLastPara="1" wrap="square" lIns="91425" tIns="91425" rIns="91425" bIns="91425" anchor="ctr" anchorCtr="0">
+            <a:normAutofit/>
+          </a:bodyPr>
+          <a:lstStyle/>
+          <a:p>
+            <a:pPr marL="0" lvl="0" indent="0" algn="r" rtl="0">
+              <a:spcBef>
+                <a:spcPts val="0"/>
+              </a:spcBef>
+              <a:spcAft>
+                <a:spcPts val="0"/>
+              </a:spcAft>
+              <a:buNone/>
+            </a:pPr>
+            <a:fld id="{00000000-1234-1234-1234-123412341234}" type="slidenum">
+              <a:rPr lang="en"/>
+              <a:t>11</a:t>
+            </a:fld>
+            <a:endParaRPr/>
+          </a:p>
+        </p:txBody>
+      </p:sp>
+      <p:sp>
+        <p:nvSpPr>
+          <p:cNvPr id="300" name="Google Shape;300;p41">
+            <a:extLst>
+              <a:ext uri="{FF2B5EF4-FFF2-40B4-BE49-F238E27FC236}">
+                <a16:creationId xmlns:a16="http://schemas.microsoft.com/office/drawing/2014/main" id="{456C44E0-BA86-14EE-2967-48D8712AE587}"/>
+              </a:ext>
+            </a:extLst>
+          </p:cNvPr>
+          <p:cNvSpPr txBox="1">
+            <a:spLocks noGrp="1"/>
+          </p:cNvSpPr>
+          <p:nvPr>
+            <p:ph type="body" idx="2"/>
+          </p:nvPr>
+        </p:nvSpPr>
+        <p:spPr>
+          <a:xfrm>
+            <a:off x="6452200" y="196725"/>
+            <a:ext cx="2569200" cy="209100"/>
+          </a:xfrm>
+          <a:prstGeom prst="rect">
+            <a:avLst/>
+          </a:prstGeom>
+        </p:spPr>
+        <p:txBody>
+          <a:bodyPr spcFirstLastPara="1" wrap="square" lIns="91425" tIns="91425" rIns="91425" bIns="91425" anchor="ctr" anchorCtr="0">
+            <a:noAutofit/>
+          </a:bodyPr>
+          <a:lstStyle/>
+          <a:p>
+            <a:pPr marL="0" lvl="0" indent="0" algn="r" rtl="0">
+              <a:spcBef>
+                <a:spcPts val="0"/>
+              </a:spcBef>
+              <a:spcAft>
+                <a:spcPts val="1200"/>
+              </a:spcAft>
+              <a:buNone/>
+            </a:pPr>
+            <a:r>
+              <a:rPr lang="en"/>
+              <a:t>CSYE 7380 - Theory &amp; Prac App AI Gen Model College of Engineering, Northeastern University </a:t>
+            </a:r>
+            <a:endParaRPr/>
+          </a:p>
+        </p:txBody>
+      </p:sp>
+      <p:sp>
+        <p:nvSpPr>
+          <p:cNvPr id="301" name="Google Shape;301;p41">
+            <a:extLst>
+              <a:ext uri="{FF2B5EF4-FFF2-40B4-BE49-F238E27FC236}">
+                <a16:creationId xmlns:a16="http://schemas.microsoft.com/office/drawing/2014/main" id="{F7E58626-0563-45BD-A4CA-19AAE8D51640}"/>
+              </a:ext>
+            </a:extLst>
+          </p:cNvPr>
+          <p:cNvSpPr txBox="1"/>
+          <p:nvPr/>
+        </p:nvSpPr>
+        <p:spPr>
+          <a:xfrm>
+            <a:off x="516437" y="744789"/>
+            <a:ext cx="7043700" cy="493800"/>
+          </a:xfrm>
+          <a:prstGeom prst="rect">
+            <a:avLst/>
+          </a:prstGeom>
+          <a:noFill/>
+          <a:ln>
+            <a:noFill/>
+          </a:ln>
+        </p:spPr>
+        <p:txBody>
+          <a:bodyPr spcFirstLastPara="1" wrap="square" lIns="91425" tIns="91425" rIns="91425" bIns="91425" anchor="ctr" anchorCtr="0">
+            <a:noAutofit/>
+          </a:bodyPr>
+          <a:lstStyle/>
+          <a:p>
+            <a:pPr marL="0" lvl="0" indent="0" algn="l" rtl="0">
+              <a:spcBef>
+                <a:spcPts val="0"/>
+              </a:spcBef>
+              <a:spcAft>
+                <a:spcPts val="0"/>
+              </a:spcAft>
+              <a:buNone/>
+            </a:pPr>
+            <a:r>
+              <a:rPr lang="en" sz="2250" b="1" dirty="0">
+                <a:solidFill>
+                  <a:schemeClr val="dk1"/>
+                </a:solidFill>
+                <a:latin typeface="Merriweather"/>
+                <a:ea typeface="Merriweather"/>
+                <a:cs typeface="Merriweather"/>
+                <a:sym typeface="Merriweather"/>
+              </a:rPr>
+              <a:t>Model Interpretation（</a:t>
+            </a:r>
+            <a:r>
+              <a:rPr lang="en-US" sz="2250" b="1" dirty="0">
+                <a:solidFill>
+                  <a:schemeClr val="dk1"/>
+                </a:solidFill>
+                <a:latin typeface="Merriweather"/>
+                <a:ea typeface="Merriweather"/>
+                <a:cs typeface="Merriweather"/>
+                <a:sym typeface="Merriweather"/>
+              </a:rPr>
+              <a:t>SMOTE</a:t>
+            </a:r>
+            <a:r>
+              <a:rPr lang="en" sz="2250" b="1" dirty="0">
+                <a:solidFill>
+                  <a:schemeClr val="dk1"/>
+                </a:solidFill>
+                <a:latin typeface="Merriweather"/>
+                <a:ea typeface="Merriweather"/>
+                <a:cs typeface="Merriweather"/>
+                <a:sym typeface="Merriweather"/>
+              </a:rPr>
+              <a:t>）</a:t>
+            </a:r>
+            <a:endParaRPr sz="3650" b="1" dirty="0">
+              <a:solidFill>
+                <a:schemeClr val="dk1"/>
+              </a:solidFill>
+              <a:latin typeface="Merriweather"/>
+              <a:ea typeface="Merriweather"/>
+              <a:cs typeface="Merriweather"/>
+              <a:sym typeface="Merriweather"/>
+            </a:endParaRPr>
+          </a:p>
+        </p:txBody>
+      </p:sp>
+      <p:sp>
+        <p:nvSpPr>
+          <p:cNvPr id="302" name="Google Shape;302;p41">
+            <a:extLst>
+              <a:ext uri="{FF2B5EF4-FFF2-40B4-BE49-F238E27FC236}">
+                <a16:creationId xmlns:a16="http://schemas.microsoft.com/office/drawing/2014/main" id="{9C5959C0-8370-01AF-0C60-04F094FC6E7C}"/>
+              </a:ext>
+            </a:extLst>
+          </p:cNvPr>
+          <p:cNvSpPr txBox="1"/>
+          <p:nvPr/>
+        </p:nvSpPr>
+        <p:spPr>
+          <a:xfrm>
+            <a:off x="516424" y="1370275"/>
+            <a:ext cx="7114747" cy="2726400"/>
+          </a:xfrm>
+          <a:prstGeom prst="rect">
+            <a:avLst/>
+          </a:prstGeom>
+          <a:noFill/>
+          <a:ln>
+            <a:noFill/>
+          </a:ln>
+        </p:spPr>
+        <p:txBody>
+          <a:bodyPr spcFirstLastPara="1" wrap="square" lIns="91425" tIns="91425" rIns="91425" bIns="91425" anchor="t" anchorCtr="0">
+            <a:noAutofit/>
+          </a:bodyPr>
+          <a:lstStyle/>
+          <a:p>
+            <a:pPr>
+              <a:lnSpc>
+                <a:spcPct val="115000"/>
+              </a:lnSpc>
+              <a:spcBef>
+                <a:spcPts val="1400"/>
+              </a:spcBef>
+            </a:pPr>
+            <a:r>
+              <a:rPr lang="en" sz="1300" b="1" dirty="0">
+                <a:solidFill>
+                  <a:schemeClr val="hlink"/>
+                </a:solidFill>
+              </a:rPr>
+              <a:t>🔹 </a:t>
+            </a:r>
+            <a:r>
+              <a:rPr lang="en-US" altLang="zh-CN" sz="1400" dirty="0">
+                <a:solidFill>
+                  <a:schemeClr val="hlink"/>
+                </a:solidFill>
+                <a:latin typeface="Times New Roman"/>
+                <a:ea typeface="Times New Roman"/>
+                <a:cs typeface="Times New Roman"/>
+                <a:sym typeface="Times New Roman"/>
+              </a:rPr>
+              <a:t>SMOTE (Synthetic Minority Over-sampling Technique) helps balance the dataset by generating synthetic samples for the minority class, improving model performance on imbalanced data.</a:t>
+            </a:r>
+          </a:p>
+          <a:p>
+            <a:pPr marL="0" lvl="0" indent="0" algn="l" rtl="0">
+              <a:lnSpc>
+                <a:spcPct val="115000"/>
+              </a:lnSpc>
+              <a:spcBef>
+                <a:spcPts val="1400"/>
+              </a:spcBef>
+              <a:spcAft>
+                <a:spcPts val="0"/>
+              </a:spcAft>
+              <a:buNone/>
+            </a:pPr>
+            <a:endParaRPr sz="1300" b="1" dirty="0">
+              <a:solidFill>
+                <a:schemeClr val="hlink"/>
+              </a:solidFill>
+            </a:endParaRPr>
+          </a:p>
+        </p:txBody>
+      </p:sp>
+      <p:pic>
+        <p:nvPicPr>
+          <p:cNvPr id="6" name="Google Shape;278;p38">
+            <a:extLst>
+              <a:ext uri="{FF2B5EF4-FFF2-40B4-BE49-F238E27FC236}">
+                <a16:creationId xmlns:a16="http://schemas.microsoft.com/office/drawing/2014/main" id="{F86C7BC3-38C1-62EF-11F6-90C3956693B0}"/>
+              </a:ext>
+            </a:extLst>
+          </p:cNvPr>
+          <p:cNvPicPr preferRelativeResize="0"/>
+          <p:nvPr/>
+        </p:nvPicPr>
+        <p:blipFill>
+          <a:blip r:embed="rId3">
+            <a:alphaModFix/>
+          </a:blip>
+          <a:stretch>
+            <a:fillRect/>
+          </a:stretch>
+        </p:blipFill>
+        <p:spPr>
+          <a:xfrm>
+            <a:off x="1869325" y="2425853"/>
+            <a:ext cx="5403726" cy="2237364"/>
+          </a:xfrm>
+          <a:prstGeom prst="rect">
+            <a:avLst/>
+          </a:prstGeom>
+          <a:noFill/>
+          <a:ln>
+            <a:noFill/>
+          </a:ln>
+        </p:spPr>
+      </p:pic>
+    </p:spTree>
+    <p:extLst>
+      <p:ext uri="{BB962C8B-B14F-4D97-AF65-F5344CB8AC3E}">
+        <p14:creationId xmlns:p14="http://schemas.microsoft.com/office/powerpoint/2010/main" val="4086560253"/>
+      </p:ext>
+    </p:extLst>
+  </p:cSld>
+  <p:clrMapOvr>
+    <a:masterClrMapping/>
+  </p:clrMapOvr>
+</p:sld>
+</file>
+
+<file path=ppt/slides/slide12.xml><?xml version="1.0" encoding="utf-8"?>
 <p:sld xmlns:a="http://schemas.openxmlformats.org/drawingml/2006/main" xmlns:r="http://schemas.openxmlformats.org/officeDocument/2006/relationships" xmlns:p="http://schemas.openxmlformats.org/presentationml/2006/main" showMasterSp="0">
   <p:cSld>
     <p:spTree>
@@ -26927,7 +27341,7 @@
             </a:pPr>
             <a:fld id="{00000000-1234-1234-1234-123412341234}" type="slidenum">
               <a:rPr lang="en"/>
-              <a:t>11</a:t>
+              <a:t>12</a:t>
             </a:fld>
             <a:endParaRPr/>
           </a:p>
@@ -27206,7 +27620,7 @@
 </p:sld>
 </file>
 
-<file path=ppt/slides/slide12.xml><?xml version="1.0" encoding="utf-8"?>
+<file path=ppt/slides/slide13.xml><?xml version="1.0" encoding="utf-8"?>
 <p:sld xmlns:a="http://schemas.openxmlformats.org/drawingml/2006/main" xmlns:r="http://schemas.openxmlformats.org/officeDocument/2006/relationships" xmlns:p="http://schemas.openxmlformats.org/presentationml/2006/main" showMasterSp="0">
   <p:cSld>
     <p:spTree>
@@ -27259,7 +27673,7 @@
             </a:pPr>
             <a:fld id="{00000000-1234-1234-1234-123412341234}" type="slidenum">
               <a:rPr lang="en"/>
-              <a:t>12</a:t>
+              <a:t>13</a:t>
             </a:fld>
             <a:endParaRPr/>
           </a:p>
@@ -27552,7 +27966,7 @@
 </p:sld>
 </file>
 
-<file path=ppt/slides/slide13.xml><?xml version="1.0" encoding="utf-8"?>
+<file path=ppt/slides/slide14.xml><?xml version="1.0" encoding="utf-8"?>
 <p:sld xmlns:a="http://schemas.openxmlformats.org/drawingml/2006/main" xmlns:r="http://schemas.openxmlformats.org/officeDocument/2006/relationships" xmlns:p="http://schemas.openxmlformats.org/presentationml/2006/main" showMasterSp="0">
   <p:cSld>
     <p:spTree>
@@ -27605,7 +28019,7 @@
             </a:pPr>
             <a:fld id="{00000000-1234-1234-1234-123412341234}" type="slidenum">
               <a:rPr lang="en"/>
-              <a:t>13</a:t>
+              <a:t>14</a:t>
             </a:fld>
             <a:endParaRPr/>
           </a:p>
@@ -28198,7 +28612,7 @@
 </p:sld>
 </file>
 
-<file path=ppt/slides/slide14.xml><?xml version="1.0" encoding="utf-8"?>
+<file path=ppt/slides/slide15.xml><?xml version="1.0" encoding="utf-8"?>
 <p:sld xmlns:a="http://schemas.openxmlformats.org/drawingml/2006/main" xmlns:r="http://schemas.openxmlformats.org/officeDocument/2006/relationships" xmlns:p="http://schemas.openxmlformats.org/presentationml/2006/main" showMasterSp="0">
   <p:cSld>
     <p:bg>
@@ -28259,7 +28673,7 @@
             </a:pPr>
             <a:fld id="{00000000-1234-1234-1234-123412341234}" type="slidenum">
               <a:rPr lang="en"/>
-              <a:t>14</a:t>
+              <a:t>15</a:t>
             </a:fld>
             <a:endParaRPr/>
           </a:p>
@@ -29651,14 +30065,14 @@
               <a:buNone/>
             </a:pPr>
             <a:r>
-              <a:rPr lang="en" sz="1300" b="1">
+              <a:rPr lang="en" sz="1300" b="1" dirty="0">
                 <a:solidFill>
                   <a:schemeClr val="hlink"/>
                 </a:solidFill>
               </a:rPr>
               <a:t>🔹 Target Variable</a:t>
             </a:r>
-            <a:endParaRPr sz="1300" b="1">
+            <a:endParaRPr sz="1300" b="1" dirty="0">
               <a:solidFill>
                 <a:schemeClr val="hlink"/>
               </a:solidFill>
@@ -29682,7 +30096,7 @@
               <a:buChar char="●"/>
             </a:pPr>
             <a:r>
-              <a:rPr lang="en" sz="1100" b="1">
+              <a:rPr lang="en" sz="1100" b="1" dirty="0">
                 <a:solidFill>
                   <a:schemeClr val="hlink"/>
                 </a:solidFill>
@@ -29690,14 +30104,14 @@
               <a:t>Diabetes status：</a:t>
             </a:r>
             <a:r>
-              <a:rPr lang="en" sz="1100">
+              <a:rPr lang="en" sz="1100" dirty="0">
                 <a:solidFill>
                   <a:schemeClr val="hlink"/>
                 </a:solidFill>
               </a:rPr>
               <a:t>Binary classification: 0 = non-diabetic, 1 = diabetic</a:t>
             </a:r>
-            <a:endParaRPr sz="1100">
+            <a:endParaRPr sz="1100" dirty="0">
               <a:solidFill>
                 <a:schemeClr val="hlink"/>
               </a:solidFill>
@@ -29721,7 +30135,7 @@
               <a:buChar char="●"/>
             </a:pPr>
             <a:r>
-              <a:rPr lang="en" sz="1100" b="1">
+              <a:rPr lang="en" sz="1100" b="1" dirty="0">
                 <a:solidFill>
                   <a:schemeClr val="hlink"/>
                 </a:solidFill>
@@ -29729,14 +30143,14 @@
               <a:t>food preference scores：</a:t>
             </a:r>
             <a:r>
-              <a:rPr lang="en" sz="1100">
+              <a:rPr lang="en" sz="1100" dirty="0">
                 <a:solidFill>
                   <a:schemeClr val="hlink"/>
                 </a:solidFill>
               </a:rPr>
               <a:t> (per category, range: –5 to +5)</a:t>
             </a:r>
-            <a:endParaRPr sz="1100">
+            <a:endParaRPr sz="1100" dirty="0">
               <a:solidFill>
                 <a:schemeClr val="hlink"/>
               </a:solidFill>
@@ -29761,14 +30175,14 @@
               <a:buNone/>
             </a:pPr>
             <a:r>
-              <a:rPr lang="en" sz="1300" b="1">
+              <a:rPr lang="en" sz="1300" b="1" dirty="0">
                 <a:solidFill>
                   <a:schemeClr val="hlink"/>
                 </a:solidFill>
               </a:rPr>
               <a:t>🔹 Key Features</a:t>
             </a:r>
-            <a:endParaRPr sz="1300" b="1">
+            <a:endParaRPr sz="1300" b="1" dirty="0">
               <a:solidFill>
                 <a:schemeClr val="hlink"/>
               </a:solidFill>
@@ -29792,14 +30206,14 @@
               <a:buChar char="●"/>
             </a:pPr>
             <a:r>
-              <a:rPr lang="en" sz="1100">
+              <a:rPr lang="en" sz="1100" dirty="0">
                 <a:solidFill>
                   <a:schemeClr val="hlink"/>
                 </a:solidFill>
               </a:rPr>
               <a:t>Health data: Glucose, BMI, Age, Pregnancies</a:t>
             </a:r>
-            <a:endParaRPr sz="1100">
+            <a:endParaRPr sz="1100" dirty="0">
               <a:solidFill>
                 <a:schemeClr val="hlink"/>
               </a:solidFill>
@@ -29823,14 +30237,14 @@
               <a:buChar char="●"/>
             </a:pPr>
             <a:r>
-              <a:rPr lang="en" sz="1100">
+              <a:rPr lang="en" sz="1100" dirty="0">
                 <a:solidFill>
                   <a:schemeClr val="hlink"/>
                 </a:solidFill>
               </a:rPr>
               <a:t>User intent: Processed via MCP to get structured food preference scores</a:t>
             </a:r>
-            <a:endParaRPr sz="1100">
+            <a:endParaRPr sz="1100" dirty="0">
               <a:solidFill>
                 <a:schemeClr val="hlink"/>
               </a:solidFill>
@@ -29855,14 +30269,14 @@
               <a:buNone/>
             </a:pPr>
             <a:r>
-              <a:rPr lang="en" sz="1300" b="1">
+              <a:rPr lang="en" sz="1300" b="1" dirty="0">
                 <a:solidFill>
                   <a:schemeClr val="hlink"/>
                 </a:solidFill>
               </a:rPr>
               <a:t>🔹 Framing</a:t>
             </a:r>
-            <a:endParaRPr sz="1300" b="1">
+            <a:endParaRPr sz="1300" b="1" dirty="0">
               <a:solidFill>
                 <a:schemeClr val="hlink"/>
               </a:solidFill>
@@ -29886,7 +30300,7 @@
               <a:buChar char="●"/>
             </a:pPr>
             <a:r>
-              <a:rPr lang="en" sz="1100" b="1">
+              <a:rPr lang="en" sz="1100" b="1" dirty="0">
                 <a:solidFill>
                   <a:schemeClr val="hlink"/>
                 </a:solidFill>
@@ -29894,14 +30308,14 @@
               <a:t>Supervised Learning</a:t>
             </a:r>
             <a:r>
-              <a:rPr lang="en" sz="1100">
+              <a:rPr lang="en" sz="1100" dirty="0">
                 <a:solidFill>
                   <a:schemeClr val="hlink"/>
                 </a:solidFill>
               </a:rPr>
               <a:t> for prediction</a:t>
             </a:r>
-            <a:endParaRPr sz="1100">
+            <a:endParaRPr sz="1100" dirty="0">
               <a:solidFill>
                 <a:schemeClr val="hlink"/>
               </a:solidFill>
@@ -29925,7 +30339,7 @@
               <a:buChar char="●"/>
             </a:pPr>
             <a:r>
-              <a:rPr lang="en" sz="1100" b="1">
+              <a:rPr lang="en" sz="1100" b="1" dirty="0">
                 <a:solidFill>
                   <a:schemeClr val="hlink"/>
                 </a:solidFill>
@@ -29933,14 +30347,14 @@
               <a:t>Prompt Engineering with MCP</a:t>
             </a:r>
             <a:r>
-              <a:rPr lang="en" sz="1100">
+              <a:rPr lang="en" sz="1100" dirty="0">
                 <a:solidFill>
                   <a:schemeClr val="hlink"/>
                 </a:solidFill>
               </a:rPr>
               <a:t> for user input parsing and response generation</a:t>
             </a:r>
-            <a:endParaRPr sz="1300" b="1">
+            <a:endParaRPr sz="1300" b="1" dirty="0">
               <a:solidFill>
                 <a:schemeClr val="hlink"/>
               </a:solidFill>
@@ -29973,6 +30387,796 @@
           <a:chExt cx="0" cy="0"/>
         </a:xfrm>
       </p:grpSpPr>
+      <p:grpSp>
+        <p:nvGrpSpPr>
+          <p:cNvPr id="2" name="Group 1">
+            <a:extLst>
+              <a:ext uri="{FF2B5EF4-FFF2-40B4-BE49-F238E27FC236}">
+                <a16:creationId xmlns:a16="http://schemas.microsoft.com/office/drawing/2014/main" id="{CDB6A4B5-DDDC-821F-D80E-B472EEAC8219}"/>
+              </a:ext>
+            </a:extLst>
+          </p:cNvPr>
+          <p:cNvGrpSpPr/>
+          <p:nvPr/>
+        </p:nvGrpSpPr>
+        <p:grpSpPr>
+          <a:xfrm>
+            <a:off x="4970352" y="2824681"/>
+            <a:ext cx="3852994" cy="2087348"/>
+            <a:chOff x="1844654" y="1124228"/>
+            <a:chExt cx="8502691" cy="4680558"/>
+          </a:xfrm>
+        </p:grpSpPr>
+        <p:pic>
+          <p:nvPicPr>
+            <p:cNvPr id="3" name="Picture 2" descr="Ensemble Learning: 5 Main Approaches - KDnuggets">
+              <a:extLst>
+                <a:ext uri="{FF2B5EF4-FFF2-40B4-BE49-F238E27FC236}">
+                  <a16:creationId xmlns:a16="http://schemas.microsoft.com/office/drawing/2014/main" id="{3B4DF87E-3CE1-D3C0-6548-69A4D582C7DD}"/>
+                </a:ext>
+              </a:extLst>
+            </p:cNvPr>
+            <p:cNvPicPr>
+              <a:picLocks noChangeAspect="1" noChangeArrowheads="1"/>
+            </p:cNvPicPr>
+            <p:nvPr/>
+          </p:nvPicPr>
+          <p:blipFill rotWithShape="1">
+            <a:blip r:embed="rId3">
+              <a:extLst>
+                <a:ext uri="{28A0092B-C50C-407E-A947-70E740481C1C}">
+                  <a14:useLocalDpi xmlns:a14="http://schemas.microsoft.com/office/drawing/2010/main" val="0"/>
+                </a:ext>
+              </a:extLst>
+            </a:blip>
+            <a:srcRect b="7327"/>
+            <a:stretch>
+              <a:fillRect/>
+            </a:stretch>
+          </p:blipFill>
+          <p:spPr bwMode="auto">
+            <a:xfrm>
+              <a:off x="1844654" y="1124228"/>
+              <a:ext cx="8502691" cy="4680558"/>
+            </a:xfrm>
+            <a:prstGeom prst="rect">
+              <a:avLst/>
+            </a:prstGeom>
+            <a:noFill/>
+            <a:extLst>
+              <a:ext uri="{909E8E84-426E-40DD-AFC4-6F175D3DCCD1}">
+                <a14:hiddenFill xmlns:a14="http://schemas.microsoft.com/office/drawing/2010/main">
+                  <a:solidFill>
+                    <a:srgbClr val="FFFFFF"/>
+                  </a:solidFill>
+                </a14:hiddenFill>
+              </a:ext>
+            </a:extLst>
+          </p:spPr>
+        </p:pic>
+        <p:sp>
+          <p:nvSpPr>
+            <p:cNvPr id="4" name="Oval 3">
+              <a:extLst>
+                <a:ext uri="{FF2B5EF4-FFF2-40B4-BE49-F238E27FC236}">
+                  <a16:creationId xmlns:a16="http://schemas.microsoft.com/office/drawing/2014/main" id="{5FECF876-AC63-45A9-37D6-CDA804B567AC}"/>
+                </a:ext>
+              </a:extLst>
+            </p:cNvPr>
+            <p:cNvSpPr/>
+            <p:nvPr/>
+          </p:nvSpPr>
+          <p:spPr>
+            <a:xfrm>
+              <a:off x="2038925" y="2581438"/>
+              <a:ext cx="533144" cy="553998"/>
+            </a:xfrm>
+            <a:prstGeom prst="ellipse">
+              <a:avLst/>
+            </a:prstGeom>
+          </p:spPr>
+          <p:style>
+            <a:lnRef idx="2">
+              <a:schemeClr val="dk1">
+                <a:shade val="50000"/>
+              </a:schemeClr>
+            </a:lnRef>
+            <a:fillRef idx="1">
+              <a:schemeClr val="dk1"/>
+            </a:fillRef>
+            <a:effectRef idx="0">
+              <a:schemeClr val="dk1"/>
+            </a:effectRef>
+            <a:fontRef idx="minor">
+              <a:schemeClr val="lt1"/>
+            </a:fontRef>
+          </p:style>
+          <p:txBody>
+            <a:bodyPr rtlCol="0" anchor="ctr"/>
+            <a:lstStyle>
+              <a:defPPr>
+                <a:defRPr lang="zh-CN"/>
+              </a:defPPr>
+              <a:lvl1pPr marL="0" algn="l" defTabSz="914400" rtl="0" eaLnBrk="1" latinLnBrk="0" hangingPunct="1">
+                <a:defRPr sz="1800" kern="1200">
+                  <a:solidFill>
+                    <a:schemeClr val="lt1"/>
+                  </a:solidFill>
+                  <a:latin typeface="+mn-lt"/>
+                  <a:ea typeface="+mn-ea"/>
+                  <a:cs typeface="+mn-cs"/>
+                </a:defRPr>
+              </a:lvl1pPr>
+              <a:lvl2pPr marL="457200" algn="l" defTabSz="914400" rtl="0" eaLnBrk="1" latinLnBrk="0" hangingPunct="1">
+                <a:defRPr sz="1800" kern="1200">
+                  <a:solidFill>
+                    <a:schemeClr val="lt1"/>
+                  </a:solidFill>
+                  <a:latin typeface="+mn-lt"/>
+                  <a:ea typeface="+mn-ea"/>
+                  <a:cs typeface="+mn-cs"/>
+                </a:defRPr>
+              </a:lvl2pPr>
+              <a:lvl3pPr marL="914400" algn="l" defTabSz="914400" rtl="0" eaLnBrk="1" latinLnBrk="0" hangingPunct="1">
+                <a:defRPr sz="1800" kern="1200">
+                  <a:solidFill>
+                    <a:schemeClr val="lt1"/>
+                  </a:solidFill>
+                  <a:latin typeface="+mn-lt"/>
+                  <a:ea typeface="+mn-ea"/>
+                  <a:cs typeface="+mn-cs"/>
+                </a:defRPr>
+              </a:lvl3pPr>
+              <a:lvl4pPr marL="1371600" algn="l" defTabSz="914400" rtl="0" eaLnBrk="1" latinLnBrk="0" hangingPunct="1">
+                <a:defRPr sz="1800" kern="1200">
+                  <a:solidFill>
+                    <a:schemeClr val="lt1"/>
+                  </a:solidFill>
+                  <a:latin typeface="+mn-lt"/>
+                  <a:ea typeface="+mn-ea"/>
+                  <a:cs typeface="+mn-cs"/>
+                </a:defRPr>
+              </a:lvl4pPr>
+              <a:lvl5pPr marL="1828800" algn="l" defTabSz="914400" rtl="0" eaLnBrk="1" latinLnBrk="0" hangingPunct="1">
+                <a:defRPr sz="1800" kern="1200">
+                  <a:solidFill>
+                    <a:schemeClr val="lt1"/>
+                  </a:solidFill>
+                  <a:latin typeface="+mn-lt"/>
+                  <a:ea typeface="+mn-ea"/>
+                  <a:cs typeface="+mn-cs"/>
+                </a:defRPr>
+              </a:lvl5pPr>
+              <a:lvl6pPr marL="2286000" algn="l" defTabSz="914400" rtl="0" eaLnBrk="1" latinLnBrk="0" hangingPunct="1">
+                <a:defRPr sz="1800" kern="1200">
+                  <a:solidFill>
+                    <a:schemeClr val="lt1"/>
+                  </a:solidFill>
+                  <a:latin typeface="+mn-lt"/>
+                  <a:ea typeface="+mn-ea"/>
+                  <a:cs typeface="+mn-cs"/>
+                </a:defRPr>
+              </a:lvl6pPr>
+              <a:lvl7pPr marL="2743200" algn="l" defTabSz="914400" rtl="0" eaLnBrk="1" latinLnBrk="0" hangingPunct="1">
+                <a:defRPr sz="1800" kern="1200">
+                  <a:solidFill>
+                    <a:schemeClr val="lt1"/>
+                  </a:solidFill>
+                  <a:latin typeface="+mn-lt"/>
+                  <a:ea typeface="+mn-ea"/>
+                  <a:cs typeface="+mn-cs"/>
+                </a:defRPr>
+              </a:lvl7pPr>
+              <a:lvl8pPr marL="3200400" algn="l" defTabSz="914400" rtl="0" eaLnBrk="1" latinLnBrk="0" hangingPunct="1">
+                <a:defRPr sz="1800" kern="1200">
+                  <a:solidFill>
+                    <a:schemeClr val="lt1"/>
+                  </a:solidFill>
+                  <a:latin typeface="+mn-lt"/>
+                  <a:ea typeface="+mn-ea"/>
+                  <a:cs typeface="+mn-cs"/>
+                </a:defRPr>
+              </a:lvl8pPr>
+              <a:lvl9pPr marL="3657600" algn="l" defTabSz="914400" rtl="0" eaLnBrk="1" latinLnBrk="0" hangingPunct="1">
+                <a:defRPr sz="1800" kern="1200">
+                  <a:solidFill>
+                    <a:schemeClr val="lt1"/>
+                  </a:solidFill>
+                  <a:latin typeface="+mn-lt"/>
+                  <a:ea typeface="+mn-ea"/>
+                  <a:cs typeface="+mn-cs"/>
+                </a:defRPr>
+              </a:lvl9pPr>
+            </a:lstStyle>
+            <a:p>
+              <a:pPr algn="ctr"/>
+              <a:r>
+                <a:rPr lang="en-US" b="1" dirty="0"/>
+                <a:t>1</a:t>
+              </a:r>
+            </a:p>
+          </p:txBody>
+        </p:sp>
+        <p:sp>
+          <p:nvSpPr>
+            <p:cNvPr id="5" name="Oval 4">
+              <a:extLst>
+                <a:ext uri="{FF2B5EF4-FFF2-40B4-BE49-F238E27FC236}">
+                  <a16:creationId xmlns:a16="http://schemas.microsoft.com/office/drawing/2014/main" id="{EA42E46A-B366-E6A1-ABDB-403351E5F81C}"/>
+                </a:ext>
+              </a:extLst>
+            </p:cNvPr>
+            <p:cNvSpPr/>
+            <p:nvPr/>
+          </p:nvSpPr>
+          <p:spPr>
+            <a:xfrm>
+              <a:off x="3963758" y="2589616"/>
+              <a:ext cx="533144" cy="553998"/>
+            </a:xfrm>
+            <a:prstGeom prst="ellipse">
+              <a:avLst/>
+            </a:prstGeom>
+          </p:spPr>
+          <p:style>
+            <a:lnRef idx="2">
+              <a:schemeClr val="dk1">
+                <a:shade val="50000"/>
+              </a:schemeClr>
+            </a:lnRef>
+            <a:fillRef idx="1">
+              <a:schemeClr val="dk1"/>
+            </a:fillRef>
+            <a:effectRef idx="0">
+              <a:schemeClr val="dk1"/>
+            </a:effectRef>
+            <a:fontRef idx="minor">
+              <a:schemeClr val="lt1"/>
+            </a:fontRef>
+          </p:style>
+          <p:txBody>
+            <a:bodyPr rtlCol="0" anchor="ctr"/>
+            <a:lstStyle>
+              <a:defPPr>
+                <a:defRPr lang="zh-CN"/>
+              </a:defPPr>
+              <a:lvl1pPr marL="0" algn="l" defTabSz="914400" rtl="0" eaLnBrk="1" latinLnBrk="0" hangingPunct="1">
+                <a:defRPr sz="1800" kern="1200">
+                  <a:solidFill>
+                    <a:schemeClr val="lt1"/>
+                  </a:solidFill>
+                  <a:latin typeface="+mn-lt"/>
+                  <a:ea typeface="+mn-ea"/>
+                  <a:cs typeface="+mn-cs"/>
+                </a:defRPr>
+              </a:lvl1pPr>
+              <a:lvl2pPr marL="457200" algn="l" defTabSz="914400" rtl="0" eaLnBrk="1" latinLnBrk="0" hangingPunct="1">
+                <a:defRPr sz="1800" kern="1200">
+                  <a:solidFill>
+                    <a:schemeClr val="lt1"/>
+                  </a:solidFill>
+                  <a:latin typeface="+mn-lt"/>
+                  <a:ea typeface="+mn-ea"/>
+                  <a:cs typeface="+mn-cs"/>
+                </a:defRPr>
+              </a:lvl2pPr>
+              <a:lvl3pPr marL="914400" algn="l" defTabSz="914400" rtl="0" eaLnBrk="1" latinLnBrk="0" hangingPunct="1">
+                <a:defRPr sz="1800" kern="1200">
+                  <a:solidFill>
+                    <a:schemeClr val="lt1"/>
+                  </a:solidFill>
+                  <a:latin typeface="+mn-lt"/>
+                  <a:ea typeface="+mn-ea"/>
+                  <a:cs typeface="+mn-cs"/>
+                </a:defRPr>
+              </a:lvl3pPr>
+              <a:lvl4pPr marL="1371600" algn="l" defTabSz="914400" rtl="0" eaLnBrk="1" latinLnBrk="0" hangingPunct="1">
+                <a:defRPr sz="1800" kern="1200">
+                  <a:solidFill>
+                    <a:schemeClr val="lt1"/>
+                  </a:solidFill>
+                  <a:latin typeface="+mn-lt"/>
+                  <a:ea typeface="+mn-ea"/>
+                  <a:cs typeface="+mn-cs"/>
+                </a:defRPr>
+              </a:lvl4pPr>
+              <a:lvl5pPr marL="1828800" algn="l" defTabSz="914400" rtl="0" eaLnBrk="1" latinLnBrk="0" hangingPunct="1">
+                <a:defRPr sz="1800" kern="1200">
+                  <a:solidFill>
+                    <a:schemeClr val="lt1"/>
+                  </a:solidFill>
+                  <a:latin typeface="+mn-lt"/>
+                  <a:ea typeface="+mn-ea"/>
+                  <a:cs typeface="+mn-cs"/>
+                </a:defRPr>
+              </a:lvl5pPr>
+              <a:lvl6pPr marL="2286000" algn="l" defTabSz="914400" rtl="0" eaLnBrk="1" latinLnBrk="0" hangingPunct="1">
+                <a:defRPr sz="1800" kern="1200">
+                  <a:solidFill>
+                    <a:schemeClr val="lt1"/>
+                  </a:solidFill>
+                  <a:latin typeface="+mn-lt"/>
+                  <a:ea typeface="+mn-ea"/>
+                  <a:cs typeface="+mn-cs"/>
+                </a:defRPr>
+              </a:lvl6pPr>
+              <a:lvl7pPr marL="2743200" algn="l" defTabSz="914400" rtl="0" eaLnBrk="1" latinLnBrk="0" hangingPunct="1">
+                <a:defRPr sz="1800" kern="1200">
+                  <a:solidFill>
+                    <a:schemeClr val="lt1"/>
+                  </a:solidFill>
+                  <a:latin typeface="+mn-lt"/>
+                  <a:ea typeface="+mn-ea"/>
+                  <a:cs typeface="+mn-cs"/>
+                </a:defRPr>
+              </a:lvl7pPr>
+              <a:lvl8pPr marL="3200400" algn="l" defTabSz="914400" rtl="0" eaLnBrk="1" latinLnBrk="0" hangingPunct="1">
+                <a:defRPr sz="1800" kern="1200">
+                  <a:solidFill>
+                    <a:schemeClr val="lt1"/>
+                  </a:solidFill>
+                  <a:latin typeface="+mn-lt"/>
+                  <a:ea typeface="+mn-ea"/>
+                  <a:cs typeface="+mn-cs"/>
+                </a:defRPr>
+              </a:lvl8pPr>
+              <a:lvl9pPr marL="3657600" algn="l" defTabSz="914400" rtl="0" eaLnBrk="1" latinLnBrk="0" hangingPunct="1">
+                <a:defRPr sz="1800" kern="1200">
+                  <a:solidFill>
+                    <a:schemeClr val="lt1"/>
+                  </a:solidFill>
+                  <a:latin typeface="+mn-lt"/>
+                  <a:ea typeface="+mn-ea"/>
+                  <a:cs typeface="+mn-cs"/>
+                </a:defRPr>
+              </a:lvl9pPr>
+            </a:lstStyle>
+            <a:p>
+              <a:pPr algn="ctr"/>
+              <a:r>
+                <a:rPr lang="en-US" b="1" dirty="0"/>
+                <a:t>1</a:t>
+              </a:r>
+            </a:p>
+          </p:txBody>
+        </p:sp>
+        <p:sp>
+          <p:nvSpPr>
+            <p:cNvPr id="6" name="Oval 5">
+              <a:extLst>
+                <a:ext uri="{FF2B5EF4-FFF2-40B4-BE49-F238E27FC236}">
+                  <a16:creationId xmlns:a16="http://schemas.microsoft.com/office/drawing/2014/main" id="{CAF66FB7-76E2-C6A2-5E85-14A0318F9701}"/>
+                </a:ext>
+              </a:extLst>
+            </p:cNvPr>
+            <p:cNvSpPr/>
+            <p:nvPr/>
+          </p:nvSpPr>
+          <p:spPr>
+            <a:xfrm>
+              <a:off x="5907380" y="2589616"/>
+              <a:ext cx="533144" cy="553998"/>
+            </a:xfrm>
+            <a:prstGeom prst="ellipse">
+              <a:avLst/>
+            </a:prstGeom>
+          </p:spPr>
+          <p:style>
+            <a:lnRef idx="2">
+              <a:schemeClr val="dk1">
+                <a:shade val="50000"/>
+              </a:schemeClr>
+            </a:lnRef>
+            <a:fillRef idx="1">
+              <a:schemeClr val="dk1"/>
+            </a:fillRef>
+            <a:effectRef idx="0">
+              <a:schemeClr val="dk1"/>
+            </a:effectRef>
+            <a:fontRef idx="minor">
+              <a:schemeClr val="lt1"/>
+            </a:fontRef>
+          </p:style>
+          <p:txBody>
+            <a:bodyPr rtlCol="0" anchor="ctr"/>
+            <a:lstStyle>
+              <a:defPPr>
+                <a:defRPr lang="zh-CN"/>
+              </a:defPPr>
+              <a:lvl1pPr marL="0" algn="l" defTabSz="914400" rtl="0" eaLnBrk="1" latinLnBrk="0" hangingPunct="1">
+                <a:defRPr sz="1800" kern="1200">
+                  <a:solidFill>
+                    <a:schemeClr val="lt1"/>
+                  </a:solidFill>
+                  <a:latin typeface="+mn-lt"/>
+                  <a:ea typeface="+mn-ea"/>
+                  <a:cs typeface="+mn-cs"/>
+                </a:defRPr>
+              </a:lvl1pPr>
+              <a:lvl2pPr marL="457200" algn="l" defTabSz="914400" rtl="0" eaLnBrk="1" latinLnBrk="0" hangingPunct="1">
+                <a:defRPr sz="1800" kern="1200">
+                  <a:solidFill>
+                    <a:schemeClr val="lt1"/>
+                  </a:solidFill>
+                  <a:latin typeface="+mn-lt"/>
+                  <a:ea typeface="+mn-ea"/>
+                  <a:cs typeface="+mn-cs"/>
+                </a:defRPr>
+              </a:lvl2pPr>
+              <a:lvl3pPr marL="914400" algn="l" defTabSz="914400" rtl="0" eaLnBrk="1" latinLnBrk="0" hangingPunct="1">
+                <a:defRPr sz="1800" kern="1200">
+                  <a:solidFill>
+                    <a:schemeClr val="lt1"/>
+                  </a:solidFill>
+                  <a:latin typeface="+mn-lt"/>
+                  <a:ea typeface="+mn-ea"/>
+                  <a:cs typeface="+mn-cs"/>
+                </a:defRPr>
+              </a:lvl3pPr>
+              <a:lvl4pPr marL="1371600" algn="l" defTabSz="914400" rtl="0" eaLnBrk="1" latinLnBrk="0" hangingPunct="1">
+                <a:defRPr sz="1800" kern="1200">
+                  <a:solidFill>
+                    <a:schemeClr val="lt1"/>
+                  </a:solidFill>
+                  <a:latin typeface="+mn-lt"/>
+                  <a:ea typeface="+mn-ea"/>
+                  <a:cs typeface="+mn-cs"/>
+                </a:defRPr>
+              </a:lvl4pPr>
+              <a:lvl5pPr marL="1828800" algn="l" defTabSz="914400" rtl="0" eaLnBrk="1" latinLnBrk="0" hangingPunct="1">
+                <a:defRPr sz="1800" kern="1200">
+                  <a:solidFill>
+                    <a:schemeClr val="lt1"/>
+                  </a:solidFill>
+                  <a:latin typeface="+mn-lt"/>
+                  <a:ea typeface="+mn-ea"/>
+                  <a:cs typeface="+mn-cs"/>
+                </a:defRPr>
+              </a:lvl5pPr>
+              <a:lvl6pPr marL="2286000" algn="l" defTabSz="914400" rtl="0" eaLnBrk="1" latinLnBrk="0" hangingPunct="1">
+                <a:defRPr sz="1800" kern="1200">
+                  <a:solidFill>
+                    <a:schemeClr val="lt1"/>
+                  </a:solidFill>
+                  <a:latin typeface="+mn-lt"/>
+                  <a:ea typeface="+mn-ea"/>
+                  <a:cs typeface="+mn-cs"/>
+                </a:defRPr>
+              </a:lvl6pPr>
+              <a:lvl7pPr marL="2743200" algn="l" defTabSz="914400" rtl="0" eaLnBrk="1" latinLnBrk="0" hangingPunct="1">
+                <a:defRPr sz="1800" kern="1200">
+                  <a:solidFill>
+                    <a:schemeClr val="lt1"/>
+                  </a:solidFill>
+                  <a:latin typeface="+mn-lt"/>
+                  <a:ea typeface="+mn-ea"/>
+                  <a:cs typeface="+mn-cs"/>
+                </a:defRPr>
+              </a:lvl7pPr>
+              <a:lvl8pPr marL="3200400" algn="l" defTabSz="914400" rtl="0" eaLnBrk="1" latinLnBrk="0" hangingPunct="1">
+                <a:defRPr sz="1800" kern="1200">
+                  <a:solidFill>
+                    <a:schemeClr val="lt1"/>
+                  </a:solidFill>
+                  <a:latin typeface="+mn-lt"/>
+                  <a:ea typeface="+mn-ea"/>
+                  <a:cs typeface="+mn-cs"/>
+                </a:defRPr>
+              </a:lvl8pPr>
+              <a:lvl9pPr marL="3657600" algn="l" defTabSz="914400" rtl="0" eaLnBrk="1" latinLnBrk="0" hangingPunct="1">
+                <a:defRPr sz="1800" kern="1200">
+                  <a:solidFill>
+                    <a:schemeClr val="lt1"/>
+                  </a:solidFill>
+                  <a:latin typeface="+mn-lt"/>
+                  <a:ea typeface="+mn-ea"/>
+                  <a:cs typeface="+mn-cs"/>
+                </a:defRPr>
+              </a:lvl9pPr>
+            </a:lstStyle>
+            <a:p>
+              <a:pPr algn="ctr"/>
+              <a:r>
+                <a:rPr lang="en-US" b="1" dirty="0"/>
+                <a:t>1</a:t>
+              </a:r>
+            </a:p>
+          </p:txBody>
+        </p:sp>
+        <p:sp>
+          <p:nvSpPr>
+            <p:cNvPr id="7" name="Oval 6">
+              <a:extLst>
+                <a:ext uri="{FF2B5EF4-FFF2-40B4-BE49-F238E27FC236}">
+                  <a16:creationId xmlns:a16="http://schemas.microsoft.com/office/drawing/2014/main" id="{BB82157E-BF5A-42B4-E945-CCAFB92F1C61}"/>
+                </a:ext>
+              </a:extLst>
+            </p:cNvPr>
+            <p:cNvSpPr/>
+            <p:nvPr/>
+          </p:nvSpPr>
+          <p:spPr>
+            <a:xfrm>
+              <a:off x="7851002" y="2581896"/>
+              <a:ext cx="542932" cy="553998"/>
+            </a:xfrm>
+            <a:prstGeom prst="ellipse">
+              <a:avLst/>
+            </a:prstGeom>
+            <a:solidFill>
+              <a:schemeClr val="bg1"/>
+            </a:solidFill>
+          </p:spPr>
+          <p:style>
+            <a:lnRef idx="2">
+              <a:schemeClr val="dk1">
+                <a:shade val="50000"/>
+              </a:schemeClr>
+            </a:lnRef>
+            <a:fillRef idx="1">
+              <a:schemeClr val="dk1"/>
+            </a:fillRef>
+            <a:effectRef idx="0">
+              <a:schemeClr val="dk1"/>
+            </a:effectRef>
+            <a:fontRef idx="minor">
+              <a:schemeClr val="lt1"/>
+            </a:fontRef>
+          </p:style>
+          <p:txBody>
+            <a:bodyPr rtlCol="0" anchor="ctr"/>
+            <a:lstStyle>
+              <a:defPPr>
+                <a:defRPr lang="zh-CN"/>
+              </a:defPPr>
+              <a:lvl1pPr marL="0" algn="l" defTabSz="914400" rtl="0" eaLnBrk="1" latinLnBrk="0" hangingPunct="1">
+                <a:defRPr sz="1800" kern="1200">
+                  <a:solidFill>
+                    <a:schemeClr val="lt1"/>
+                  </a:solidFill>
+                  <a:latin typeface="+mn-lt"/>
+                  <a:ea typeface="+mn-ea"/>
+                  <a:cs typeface="+mn-cs"/>
+                </a:defRPr>
+              </a:lvl1pPr>
+              <a:lvl2pPr marL="457200" algn="l" defTabSz="914400" rtl="0" eaLnBrk="1" latinLnBrk="0" hangingPunct="1">
+                <a:defRPr sz="1800" kern="1200">
+                  <a:solidFill>
+                    <a:schemeClr val="lt1"/>
+                  </a:solidFill>
+                  <a:latin typeface="+mn-lt"/>
+                  <a:ea typeface="+mn-ea"/>
+                  <a:cs typeface="+mn-cs"/>
+                </a:defRPr>
+              </a:lvl2pPr>
+              <a:lvl3pPr marL="914400" algn="l" defTabSz="914400" rtl="0" eaLnBrk="1" latinLnBrk="0" hangingPunct="1">
+                <a:defRPr sz="1800" kern="1200">
+                  <a:solidFill>
+                    <a:schemeClr val="lt1"/>
+                  </a:solidFill>
+                  <a:latin typeface="+mn-lt"/>
+                  <a:ea typeface="+mn-ea"/>
+                  <a:cs typeface="+mn-cs"/>
+                </a:defRPr>
+              </a:lvl3pPr>
+              <a:lvl4pPr marL="1371600" algn="l" defTabSz="914400" rtl="0" eaLnBrk="1" latinLnBrk="0" hangingPunct="1">
+                <a:defRPr sz="1800" kern="1200">
+                  <a:solidFill>
+                    <a:schemeClr val="lt1"/>
+                  </a:solidFill>
+                  <a:latin typeface="+mn-lt"/>
+                  <a:ea typeface="+mn-ea"/>
+                  <a:cs typeface="+mn-cs"/>
+                </a:defRPr>
+              </a:lvl4pPr>
+              <a:lvl5pPr marL="1828800" algn="l" defTabSz="914400" rtl="0" eaLnBrk="1" latinLnBrk="0" hangingPunct="1">
+                <a:defRPr sz="1800" kern="1200">
+                  <a:solidFill>
+                    <a:schemeClr val="lt1"/>
+                  </a:solidFill>
+                  <a:latin typeface="+mn-lt"/>
+                  <a:ea typeface="+mn-ea"/>
+                  <a:cs typeface="+mn-cs"/>
+                </a:defRPr>
+              </a:lvl5pPr>
+              <a:lvl6pPr marL="2286000" algn="l" defTabSz="914400" rtl="0" eaLnBrk="1" latinLnBrk="0" hangingPunct="1">
+                <a:defRPr sz="1800" kern="1200">
+                  <a:solidFill>
+                    <a:schemeClr val="lt1"/>
+                  </a:solidFill>
+                  <a:latin typeface="+mn-lt"/>
+                  <a:ea typeface="+mn-ea"/>
+                  <a:cs typeface="+mn-cs"/>
+                </a:defRPr>
+              </a:lvl6pPr>
+              <a:lvl7pPr marL="2743200" algn="l" defTabSz="914400" rtl="0" eaLnBrk="1" latinLnBrk="0" hangingPunct="1">
+                <a:defRPr sz="1800" kern="1200">
+                  <a:solidFill>
+                    <a:schemeClr val="lt1"/>
+                  </a:solidFill>
+                  <a:latin typeface="+mn-lt"/>
+                  <a:ea typeface="+mn-ea"/>
+                  <a:cs typeface="+mn-cs"/>
+                </a:defRPr>
+              </a:lvl7pPr>
+              <a:lvl8pPr marL="3200400" algn="l" defTabSz="914400" rtl="0" eaLnBrk="1" latinLnBrk="0" hangingPunct="1">
+                <a:defRPr sz="1800" kern="1200">
+                  <a:solidFill>
+                    <a:schemeClr val="lt1"/>
+                  </a:solidFill>
+                  <a:latin typeface="+mn-lt"/>
+                  <a:ea typeface="+mn-ea"/>
+                  <a:cs typeface="+mn-cs"/>
+                </a:defRPr>
+              </a:lvl8pPr>
+              <a:lvl9pPr marL="3657600" algn="l" defTabSz="914400" rtl="0" eaLnBrk="1" latinLnBrk="0" hangingPunct="1">
+                <a:defRPr sz="1800" kern="1200">
+                  <a:solidFill>
+                    <a:schemeClr val="lt1"/>
+                  </a:solidFill>
+                  <a:latin typeface="+mn-lt"/>
+                  <a:ea typeface="+mn-ea"/>
+                  <a:cs typeface="+mn-cs"/>
+                </a:defRPr>
+              </a:lvl9pPr>
+            </a:lstStyle>
+            <a:p>
+              <a:pPr algn="ctr"/>
+              <a:r>
+                <a:rPr lang="en-US" b="1" dirty="0">
+                  <a:solidFill>
+                    <a:schemeClr val="tx1"/>
+                  </a:solidFill>
+                </a:rPr>
+                <a:t>0</a:t>
+              </a:r>
+            </a:p>
+          </p:txBody>
+        </p:sp>
+        <p:sp>
+          <p:nvSpPr>
+            <p:cNvPr id="8" name="Oval 7">
+              <a:extLst>
+                <a:ext uri="{FF2B5EF4-FFF2-40B4-BE49-F238E27FC236}">
+                  <a16:creationId xmlns:a16="http://schemas.microsoft.com/office/drawing/2014/main" id="{B7FA7061-6FA0-E5AC-74F2-BA290C22B5A3}"/>
+                </a:ext>
+              </a:extLst>
+            </p:cNvPr>
+            <p:cNvSpPr/>
+            <p:nvPr/>
+          </p:nvSpPr>
+          <p:spPr>
+            <a:xfrm>
+              <a:off x="4967014" y="1290093"/>
+              <a:ext cx="533144" cy="553998"/>
+            </a:xfrm>
+            <a:prstGeom prst="ellipse">
+              <a:avLst/>
+            </a:prstGeom>
+          </p:spPr>
+          <p:style>
+            <a:lnRef idx="2">
+              <a:schemeClr val="dk1">
+                <a:shade val="50000"/>
+              </a:schemeClr>
+            </a:lnRef>
+            <a:fillRef idx="1">
+              <a:schemeClr val="dk1"/>
+            </a:fillRef>
+            <a:effectRef idx="0">
+              <a:schemeClr val="dk1"/>
+            </a:effectRef>
+            <a:fontRef idx="minor">
+              <a:schemeClr val="lt1"/>
+            </a:fontRef>
+          </p:style>
+          <p:txBody>
+            <a:bodyPr rtlCol="0" anchor="ctr"/>
+            <a:lstStyle>
+              <a:defPPr>
+                <a:defRPr lang="zh-CN"/>
+              </a:defPPr>
+              <a:lvl1pPr marL="0" algn="l" defTabSz="914400" rtl="0" eaLnBrk="1" latinLnBrk="0" hangingPunct="1">
+                <a:defRPr sz="1800" kern="1200">
+                  <a:solidFill>
+                    <a:schemeClr val="lt1"/>
+                  </a:solidFill>
+                  <a:latin typeface="+mn-lt"/>
+                  <a:ea typeface="+mn-ea"/>
+                  <a:cs typeface="+mn-cs"/>
+                </a:defRPr>
+              </a:lvl1pPr>
+              <a:lvl2pPr marL="457200" algn="l" defTabSz="914400" rtl="0" eaLnBrk="1" latinLnBrk="0" hangingPunct="1">
+                <a:defRPr sz="1800" kern="1200">
+                  <a:solidFill>
+                    <a:schemeClr val="lt1"/>
+                  </a:solidFill>
+                  <a:latin typeface="+mn-lt"/>
+                  <a:ea typeface="+mn-ea"/>
+                  <a:cs typeface="+mn-cs"/>
+                </a:defRPr>
+              </a:lvl2pPr>
+              <a:lvl3pPr marL="914400" algn="l" defTabSz="914400" rtl="0" eaLnBrk="1" latinLnBrk="0" hangingPunct="1">
+                <a:defRPr sz="1800" kern="1200">
+                  <a:solidFill>
+                    <a:schemeClr val="lt1"/>
+                  </a:solidFill>
+                  <a:latin typeface="+mn-lt"/>
+                  <a:ea typeface="+mn-ea"/>
+                  <a:cs typeface="+mn-cs"/>
+                </a:defRPr>
+              </a:lvl3pPr>
+              <a:lvl4pPr marL="1371600" algn="l" defTabSz="914400" rtl="0" eaLnBrk="1" latinLnBrk="0" hangingPunct="1">
+                <a:defRPr sz="1800" kern="1200">
+                  <a:solidFill>
+                    <a:schemeClr val="lt1"/>
+                  </a:solidFill>
+                  <a:latin typeface="+mn-lt"/>
+                  <a:ea typeface="+mn-ea"/>
+                  <a:cs typeface="+mn-cs"/>
+                </a:defRPr>
+              </a:lvl4pPr>
+              <a:lvl5pPr marL="1828800" algn="l" defTabSz="914400" rtl="0" eaLnBrk="1" latinLnBrk="0" hangingPunct="1">
+                <a:defRPr sz="1800" kern="1200">
+                  <a:solidFill>
+                    <a:schemeClr val="lt1"/>
+                  </a:solidFill>
+                  <a:latin typeface="+mn-lt"/>
+                  <a:ea typeface="+mn-ea"/>
+                  <a:cs typeface="+mn-cs"/>
+                </a:defRPr>
+              </a:lvl5pPr>
+              <a:lvl6pPr marL="2286000" algn="l" defTabSz="914400" rtl="0" eaLnBrk="1" latinLnBrk="0" hangingPunct="1">
+                <a:defRPr sz="1800" kern="1200">
+                  <a:solidFill>
+                    <a:schemeClr val="lt1"/>
+                  </a:solidFill>
+                  <a:latin typeface="+mn-lt"/>
+                  <a:ea typeface="+mn-ea"/>
+                  <a:cs typeface="+mn-cs"/>
+                </a:defRPr>
+              </a:lvl6pPr>
+              <a:lvl7pPr marL="2743200" algn="l" defTabSz="914400" rtl="0" eaLnBrk="1" latinLnBrk="0" hangingPunct="1">
+                <a:defRPr sz="1800" kern="1200">
+                  <a:solidFill>
+                    <a:schemeClr val="lt1"/>
+                  </a:solidFill>
+                  <a:latin typeface="+mn-lt"/>
+                  <a:ea typeface="+mn-ea"/>
+                  <a:cs typeface="+mn-cs"/>
+                </a:defRPr>
+              </a:lvl7pPr>
+              <a:lvl8pPr marL="3200400" algn="l" defTabSz="914400" rtl="0" eaLnBrk="1" latinLnBrk="0" hangingPunct="1">
+                <a:defRPr sz="1800" kern="1200">
+                  <a:solidFill>
+                    <a:schemeClr val="lt1"/>
+                  </a:solidFill>
+                  <a:latin typeface="+mn-lt"/>
+                  <a:ea typeface="+mn-ea"/>
+                  <a:cs typeface="+mn-cs"/>
+                </a:defRPr>
+              </a:lvl8pPr>
+              <a:lvl9pPr marL="3657600" algn="l" defTabSz="914400" rtl="0" eaLnBrk="1" latinLnBrk="0" hangingPunct="1">
+                <a:defRPr sz="1800" kern="1200">
+                  <a:solidFill>
+                    <a:schemeClr val="lt1"/>
+                  </a:solidFill>
+                  <a:latin typeface="+mn-lt"/>
+                  <a:ea typeface="+mn-ea"/>
+                  <a:cs typeface="+mn-cs"/>
+                </a:defRPr>
+              </a:lvl9pPr>
+            </a:lstStyle>
+            <a:p>
+              <a:pPr algn="ctr"/>
+              <a:r>
+                <a:rPr lang="en-US" b="1" dirty="0"/>
+                <a:t>1</a:t>
+              </a:r>
+            </a:p>
+          </p:txBody>
+        </p:sp>
+      </p:grpSp>
       <p:sp>
         <p:nvSpPr>
           <p:cNvPr id="257" name="Google Shape;257;p36"/>
@@ -30092,7 +31296,7 @@
               <a:buNone/>
             </a:pPr>
             <a:r>
-              <a:rPr lang="en" sz="2250" b="1">
+              <a:rPr lang="en" sz="2250" b="1" dirty="0">
                 <a:solidFill>
                   <a:schemeClr val="dk1"/>
                 </a:solidFill>
@@ -30103,7 +31307,7 @@
               </a:rPr>
               <a:t>Model/Framework Selection &amp; Implementation</a:t>
             </a:r>
-            <a:endParaRPr sz="3650" b="1">
+            <a:endParaRPr sz="3650" b="1" dirty="0">
               <a:solidFill>
                 <a:schemeClr val="dk1"/>
               </a:solidFill>
@@ -30158,76 +31362,91 @@
               <a:buNone/>
             </a:pPr>
             <a:r>
-              <a:rPr lang="en" sz="1300" b="1">
+              <a:rPr lang="en" sz="1300" b="1" dirty="0">
                 <a:solidFill>
                   <a:schemeClr val="hlink"/>
                 </a:solidFill>
               </a:rPr>
               <a:t>🔹 ML Pipeline for Diabetes Prediction</a:t>
             </a:r>
-            <a:endParaRPr sz="1300" b="1">
+          </a:p>
+          <a:p>
+            <a:pPr marL="0" lvl="0" indent="0" algn="l" rtl="0">
+              <a:lnSpc>
+                <a:spcPct val="115000"/>
+              </a:lnSpc>
+              <a:spcBef>
+                <a:spcPts val="1400"/>
+              </a:spcBef>
+              <a:spcAft>
+                <a:spcPts val="0"/>
+              </a:spcAft>
+              <a:buClr>
+                <a:schemeClr val="hlink"/>
+              </a:buClr>
+              <a:buSzPts val="1100"/>
+              <a:buFont typeface="Arial"/>
+              <a:buNone/>
+            </a:pPr>
+            <a:endParaRPr lang="zh-CN" altLang="en-US" sz="1300" b="1" dirty="0">
               <a:solidFill>
                 <a:schemeClr val="hlink"/>
               </a:solidFill>
             </a:endParaRPr>
           </a:p>
           <a:p>
-            <a:pPr marL="457200" lvl="0" indent="-298450" algn="l" rtl="0">
+            <a:pPr marL="457200" indent="-298450">
               <a:lnSpc>
                 <a:spcPct val="115000"/>
               </a:lnSpc>
-              <a:spcBef>
-                <a:spcPts val="1200"/>
-              </a:spcBef>
-              <a:spcAft>
-                <a:spcPts val="0"/>
-              </a:spcAft>
               <a:buClr>
                 <a:schemeClr val="hlink"/>
               </a:buClr>
               <a:buSzPts val="1100"/>
+              <a:buFont typeface="Arial"/>
               <a:buChar char="●"/>
             </a:pPr>
             <a:r>
-              <a:rPr lang="en" sz="1100">
+              <a:rPr lang="en-US" altLang="zh-CN" sz="1100" dirty="0">
                 <a:solidFill>
                   <a:schemeClr val="hlink"/>
                 </a:solidFill>
               </a:rPr>
-              <a:t>Models: SVM, RF, MLP, Logistic, etc.</a:t>
+              <a:t>SMOTE for class balancing</a:t>
             </a:r>
-            <a:br>
-              <a:rPr lang="en" sz="1100">
-                <a:solidFill>
-                  <a:schemeClr val="hlink"/>
-                </a:solidFill>
-              </a:rPr>
-            </a:br>
-            <a:endParaRPr sz="1100">
+          </a:p>
+          <a:p>
+            <a:pPr marL="457200" indent="-298450">
+              <a:lnSpc>
+                <a:spcPct val="115000"/>
+              </a:lnSpc>
+              <a:buClr>
+                <a:schemeClr val="hlink"/>
+              </a:buClr>
+              <a:buSzPts val="1100"/>
+              <a:buFont typeface="Arial"/>
+              <a:buChar char="●"/>
+            </a:pPr>
+            <a:endParaRPr lang="fr-FR" sz="1100" dirty="0">
               <a:solidFill>
                 <a:schemeClr val="hlink"/>
               </a:solidFill>
             </a:endParaRPr>
           </a:p>
           <a:p>
-            <a:pPr marL="457200" lvl="0" indent="-298450" algn="l" rtl="0">
+            <a:pPr marL="457200" indent="-298450">
               <a:lnSpc>
                 <a:spcPct val="115000"/>
               </a:lnSpc>
-              <a:spcBef>
-                <a:spcPts val="0"/>
-              </a:spcBef>
-              <a:spcAft>
-                <a:spcPts val="0"/>
-              </a:spcAft>
               <a:buClr>
                 <a:schemeClr val="hlink"/>
               </a:buClr>
               <a:buSzPts val="1100"/>
+              <a:buFont typeface="Arial"/>
               <a:buChar char="●"/>
             </a:pPr>
             <a:r>
-              <a:rPr lang="en" sz="1100">
+              <a:rPr lang="en" sz="1100" dirty="0">
                 <a:solidFill>
                   <a:schemeClr val="hlink"/>
                 </a:solidFill>
@@ -30235,64 +31454,126 @@
               <a:t>Ensemble via soft voting + stacking</a:t>
             </a:r>
             <a:br>
-              <a:rPr lang="en" sz="1100">
+              <a:rPr lang="en" sz="1100" dirty="0">
                 <a:solidFill>
                   <a:schemeClr val="hlink"/>
                 </a:solidFill>
               </a:rPr>
             </a:br>
-            <a:endParaRPr sz="1100">
+            <a:endParaRPr sz="1100" dirty="0">
               <a:solidFill>
                 <a:schemeClr val="hlink"/>
               </a:solidFill>
             </a:endParaRPr>
           </a:p>
           <a:p>
-            <a:pPr marL="457200" lvl="0" indent="-298450" algn="l" rtl="0">
+            <a:pPr marL="457200" indent="-298450">
               <a:lnSpc>
                 <a:spcPct val="115000"/>
               </a:lnSpc>
-              <a:spcBef>
-                <a:spcPts val="0"/>
-              </a:spcBef>
-              <a:spcAft>
-                <a:spcPts val="0"/>
-              </a:spcAft>
               <a:buClr>
                 <a:schemeClr val="hlink"/>
               </a:buClr>
               <a:buSzPts val="1100"/>
+              <a:buFont typeface="Arial"/>
               <a:buChar char="●"/>
             </a:pPr>
             <a:r>
-              <a:rPr lang="en" sz="1100">
+              <a:rPr lang="fr-FR" altLang="zh-CN" sz="1100" dirty="0" err="1">
                 <a:solidFill>
                   <a:schemeClr val="hlink"/>
                 </a:solidFill>
               </a:rPr>
-              <a:t>SMOTE for class balancing</a:t>
+              <a:t>Models</a:t>
             </a:r>
-            <a:endParaRPr sz="1100">
-              <a:solidFill>
-                <a:schemeClr val="hlink"/>
-              </a:solidFill>
-            </a:endParaRPr>
-          </a:p>
-          <a:p>
-            <a:pPr marL="0" lvl="0" indent="0" algn="l" rtl="0">
-              <a:spcBef>
-                <a:spcPts val="1200"/>
-              </a:spcBef>
-              <a:spcAft>
-                <a:spcPts val="0"/>
-              </a:spcAft>
-              <a:buNone/>
-            </a:pPr>
-            <a:endParaRPr sz="1300" b="1">
-              <a:solidFill>
-                <a:schemeClr val="hlink"/>
-              </a:solidFill>
-            </a:endParaRPr>
+            <a:r>
+              <a:rPr lang="fr-FR" altLang="zh-CN" sz="1100" dirty="0">
+                <a:solidFill>
+                  <a:schemeClr val="hlink"/>
+                </a:solidFill>
+              </a:rPr>
+              <a:t>: </a:t>
+            </a:r>
+            <a:r>
+              <a:rPr lang="fr-FR" altLang="zh-CN" sz="1100" dirty="0" err="1">
+                <a:solidFill>
+                  <a:schemeClr val="hlink"/>
+                </a:solidFill>
+              </a:rPr>
+              <a:t>Decision</a:t>
+            </a:r>
+            <a:r>
+              <a:rPr lang="fr-FR" altLang="zh-CN" sz="1100" dirty="0">
+                <a:solidFill>
+                  <a:schemeClr val="hlink"/>
+                </a:solidFill>
+              </a:rPr>
+              <a:t> </a:t>
+            </a:r>
+            <a:r>
+              <a:rPr lang="fr-FR" altLang="zh-CN" sz="1100" dirty="0" err="1">
+                <a:solidFill>
+                  <a:schemeClr val="hlink"/>
+                </a:solidFill>
+              </a:rPr>
+              <a:t>Tree</a:t>
+            </a:r>
+            <a:r>
+              <a:rPr lang="fr-FR" altLang="zh-CN" sz="1100" dirty="0">
+                <a:solidFill>
+                  <a:schemeClr val="hlink"/>
+                </a:solidFill>
+              </a:rPr>
+              <a:t>, </a:t>
+            </a:r>
+            <a:r>
+              <a:rPr lang="fr-FR" altLang="zh-CN" sz="1100" dirty="0" err="1">
+                <a:solidFill>
+                  <a:schemeClr val="hlink"/>
+                </a:solidFill>
+              </a:rPr>
+              <a:t>GaussianNB</a:t>
+            </a:r>
+            <a:r>
+              <a:rPr lang="fr-FR" altLang="zh-CN" sz="1100" dirty="0">
+                <a:solidFill>
+                  <a:schemeClr val="hlink"/>
+                </a:solidFill>
+              </a:rPr>
+              <a:t>, KNN, </a:t>
+            </a:r>
+            <a:r>
+              <a:rPr lang="fr-FR" altLang="zh-CN" sz="1100" dirty="0" err="1">
+                <a:solidFill>
+                  <a:schemeClr val="hlink"/>
+                </a:solidFill>
+              </a:rPr>
+              <a:t>Logistic</a:t>
+            </a:r>
+            <a:r>
+              <a:rPr lang="fr-FR" altLang="zh-CN" sz="1100" dirty="0">
+                <a:solidFill>
+                  <a:schemeClr val="hlink"/>
+                </a:solidFill>
+              </a:rPr>
+              <a:t> </a:t>
+            </a:r>
+            <a:r>
+              <a:rPr lang="fr-FR" altLang="zh-CN" sz="1100" dirty="0" err="1">
+                <a:solidFill>
+                  <a:schemeClr val="hlink"/>
+                </a:solidFill>
+              </a:rPr>
+              <a:t>Regression</a:t>
+            </a:r>
+            <a:r>
+              <a:rPr lang="fr-FR" altLang="zh-CN" sz="1100" dirty="0">
+                <a:solidFill>
+                  <a:schemeClr val="hlink"/>
+                </a:solidFill>
+              </a:rPr>
+              <a:t>, SVM, MLP</a:t>
+            </a:r>
           </a:p>
         </p:txBody>
       </p:sp>
@@ -30305,1250 +31586,6 @@
 </file>
 
 <file path=ppt/slides/slide6.xml><?xml version="1.0" encoding="utf-8"?>
-<p:sld xmlns:a="http://schemas.openxmlformats.org/drawingml/2006/main" xmlns:r="http://schemas.openxmlformats.org/officeDocument/2006/relationships" xmlns:p="http://schemas.openxmlformats.org/presentationml/2006/main" showMasterSp="0">
-  <p:cSld>
-    <p:spTree>
-      <p:nvGrpSpPr>
-        <p:cNvPr id="1" name="Shape 256">
-          <a:extLst>
-            <a:ext uri="{FF2B5EF4-FFF2-40B4-BE49-F238E27FC236}">
-              <a16:creationId xmlns:a16="http://schemas.microsoft.com/office/drawing/2014/main" id="{0EA58DA1-F396-E52D-7D11-B4D5BAC82F37}"/>
-            </a:ext>
-          </a:extLst>
-        </p:cNvPr>
-        <p:cNvGrpSpPr/>
-        <p:nvPr/>
-      </p:nvGrpSpPr>
-      <p:grpSpPr>
-        <a:xfrm>
-          <a:off x="0" y="0"/>
-          <a:ext cx="0" cy="0"/>
-          <a:chOff x="0" y="0"/>
-          <a:chExt cx="0" cy="0"/>
-        </a:xfrm>
-      </p:grpSpPr>
-      <p:sp>
-        <p:nvSpPr>
-          <p:cNvPr id="258" name="Google Shape;258;p36">
-            <a:extLst>
-              <a:ext uri="{FF2B5EF4-FFF2-40B4-BE49-F238E27FC236}">
-                <a16:creationId xmlns:a16="http://schemas.microsoft.com/office/drawing/2014/main" id="{C6241B2A-2DDE-FEF6-3C92-C53D98D67989}"/>
-              </a:ext>
-            </a:extLst>
-          </p:cNvPr>
-          <p:cNvSpPr txBox="1">
-            <a:spLocks noGrp="1"/>
-          </p:cNvSpPr>
-          <p:nvPr>
-            <p:ph type="body" idx="2"/>
-          </p:nvPr>
-        </p:nvSpPr>
-        <p:spPr>
-          <a:xfrm>
-            <a:off x="6452200" y="196725"/>
-            <a:ext cx="2569200" cy="209100"/>
-          </a:xfrm>
-          <a:prstGeom prst="rect">
-            <a:avLst/>
-          </a:prstGeom>
-        </p:spPr>
-        <p:txBody>
-          <a:bodyPr spcFirstLastPara="1" wrap="square" lIns="91425" tIns="91425" rIns="91425" bIns="91425" anchor="ctr" anchorCtr="0">
-            <a:noAutofit/>
-          </a:bodyPr>
-          <a:lstStyle/>
-          <a:p>
-            <a:pPr marL="0" lvl="0" indent="0" algn="r" rtl="0">
-              <a:spcBef>
-                <a:spcPts val="0"/>
-              </a:spcBef>
-              <a:spcAft>
-                <a:spcPts val="1200"/>
-              </a:spcAft>
-              <a:buNone/>
-            </a:pPr>
-            <a:r>
-              <a:rPr lang="en" dirty="0"/>
-              <a:t>CSYE 7380 - Theory &amp; Prac App AI Gen Model College of Engineering, Northeastern University </a:t>
-            </a:r>
-            <a:endParaRPr dirty="0"/>
-          </a:p>
-        </p:txBody>
-      </p:sp>
-      <p:sp>
-        <p:nvSpPr>
-          <p:cNvPr id="2" name="Google Shape;266;p37">
-            <a:extLst>
-              <a:ext uri="{FF2B5EF4-FFF2-40B4-BE49-F238E27FC236}">
-                <a16:creationId xmlns:a16="http://schemas.microsoft.com/office/drawing/2014/main" id="{CBDC0BE0-CA79-9686-4219-0B606D18B536}"/>
-              </a:ext>
-            </a:extLst>
-          </p:cNvPr>
-          <p:cNvSpPr txBox="1">
-            <a:spLocks/>
-          </p:cNvSpPr>
-          <p:nvPr/>
-        </p:nvSpPr>
-        <p:spPr>
-          <a:xfrm>
-            <a:off x="334256" y="1121875"/>
-            <a:ext cx="4045200" cy="1235100"/>
-          </a:xfrm>
-          <a:prstGeom prst="rect">
-            <a:avLst/>
-          </a:prstGeom>
-        </p:spPr>
-        <p:txBody>
-          <a:bodyPr spcFirstLastPara="1" wrap="square" lIns="91425" tIns="91425" rIns="91425" bIns="91425" anchor="b" anchorCtr="0">
-            <a:noAutofit/>
-          </a:bodyPr>
-          <a:lstStyle>
-            <a:defPPr marR="0" lvl="0" algn="l" rtl="0">
-              <a:lnSpc>
-                <a:spcPct val="100000"/>
-              </a:lnSpc>
-              <a:spcBef>
-                <a:spcPts val="0"/>
-              </a:spcBef>
-              <a:spcAft>
-                <a:spcPts val="0"/>
-              </a:spcAft>
-            </a:defPPr>
-            <a:lvl1pPr marR="0" lvl="0" algn="l" rtl="0">
-              <a:lnSpc>
-                <a:spcPct val="100000"/>
-              </a:lnSpc>
-              <a:spcBef>
-                <a:spcPts val="0"/>
-              </a:spcBef>
-              <a:spcAft>
-                <a:spcPts val="0"/>
-              </a:spcAft>
-              <a:buClr>
-                <a:srgbClr val="000000"/>
-              </a:buClr>
-              <a:buFont typeface="Arial"/>
-              <a:defRPr sz="1400" b="0" i="0" u="none" strike="noStrike" cap="none">
-                <a:solidFill>
-                  <a:srgbClr val="000000"/>
-                </a:solidFill>
-                <a:latin typeface="Arial"/>
-                <a:ea typeface="Arial"/>
-                <a:cs typeface="Arial"/>
-                <a:sym typeface="Arial"/>
-              </a:defRPr>
-            </a:lvl1pPr>
-            <a:lvl2pPr marR="0" lvl="1" algn="l" rtl="0">
-              <a:lnSpc>
-                <a:spcPct val="100000"/>
-              </a:lnSpc>
-              <a:spcBef>
-                <a:spcPts val="0"/>
-              </a:spcBef>
-              <a:spcAft>
-                <a:spcPts val="0"/>
-              </a:spcAft>
-              <a:buClr>
-                <a:srgbClr val="000000"/>
-              </a:buClr>
-              <a:buFont typeface="Arial"/>
-              <a:defRPr sz="1400" b="0" i="0" u="none" strike="noStrike" cap="none">
-                <a:solidFill>
-                  <a:srgbClr val="000000"/>
-                </a:solidFill>
-                <a:latin typeface="Arial"/>
-                <a:ea typeface="Arial"/>
-                <a:cs typeface="Arial"/>
-                <a:sym typeface="Arial"/>
-              </a:defRPr>
-            </a:lvl2pPr>
-            <a:lvl3pPr marR="0" lvl="2" algn="l" rtl="0">
-              <a:lnSpc>
-                <a:spcPct val="100000"/>
-              </a:lnSpc>
-              <a:spcBef>
-                <a:spcPts val="0"/>
-              </a:spcBef>
-              <a:spcAft>
-                <a:spcPts val="0"/>
-              </a:spcAft>
-              <a:buClr>
-                <a:srgbClr val="000000"/>
-              </a:buClr>
-              <a:buFont typeface="Arial"/>
-              <a:defRPr sz="1400" b="0" i="0" u="none" strike="noStrike" cap="none">
-                <a:solidFill>
-                  <a:srgbClr val="000000"/>
-                </a:solidFill>
-                <a:latin typeface="Arial"/>
-                <a:ea typeface="Arial"/>
-                <a:cs typeface="Arial"/>
-                <a:sym typeface="Arial"/>
-              </a:defRPr>
-            </a:lvl3pPr>
-            <a:lvl4pPr marR="0" lvl="3" algn="l" rtl="0">
-              <a:lnSpc>
-                <a:spcPct val="100000"/>
-              </a:lnSpc>
-              <a:spcBef>
-                <a:spcPts val="0"/>
-              </a:spcBef>
-              <a:spcAft>
-                <a:spcPts val="0"/>
-              </a:spcAft>
-              <a:buClr>
-                <a:srgbClr val="000000"/>
-              </a:buClr>
-              <a:buFont typeface="Arial"/>
-              <a:defRPr sz="1400" b="0" i="0" u="none" strike="noStrike" cap="none">
-                <a:solidFill>
-                  <a:srgbClr val="000000"/>
-                </a:solidFill>
-                <a:latin typeface="Arial"/>
-                <a:ea typeface="Arial"/>
-                <a:cs typeface="Arial"/>
-                <a:sym typeface="Arial"/>
-              </a:defRPr>
-            </a:lvl4pPr>
-            <a:lvl5pPr marR="0" lvl="4" algn="l" rtl="0">
-              <a:lnSpc>
-                <a:spcPct val="100000"/>
-              </a:lnSpc>
-              <a:spcBef>
-                <a:spcPts val="0"/>
-              </a:spcBef>
-              <a:spcAft>
-                <a:spcPts val="0"/>
-              </a:spcAft>
-              <a:buClr>
-                <a:srgbClr val="000000"/>
-              </a:buClr>
-              <a:buFont typeface="Arial"/>
-              <a:defRPr sz="1400" b="0" i="0" u="none" strike="noStrike" cap="none">
-                <a:solidFill>
-                  <a:srgbClr val="000000"/>
-                </a:solidFill>
-                <a:latin typeface="Arial"/>
-                <a:ea typeface="Arial"/>
-                <a:cs typeface="Arial"/>
-                <a:sym typeface="Arial"/>
-              </a:defRPr>
-            </a:lvl5pPr>
-            <a:lvl6pPr marR="0" lvl="5" algn="l" rtl="0">
-              <a:lnSpc>
-                <a:spcPct val="100000"/>
-              </a:lnSpc>
-              <a:spcBef>
-                <a:spcPts val="0"/>
-              </a:spcBef>
-              <a:spcAft>
-                <a:spcPts val="0"/>
-              </a:spcAft>
-              <a:buClr>
-                <a:srgbClr val="000000"/>
-              </a:buClr>
-              <a:buFont typeface="Arial"/>
-              <a:defRPr sz="1400" b="0" i="0" u="none" strike="noStrike" cap="none">
-                <a:solidFill>
-                  <a:srgbClr val="000000"/>
-                </a:solidFill>
-                <a:latin typeface="Arial"/>
-                <a:ea typeface="Arial"/>
-                <a:cs typeface="Arial"/>
-                <a:sym typeface="Arial"/>
-              </a:defRPr>
-            </a:lvl6pPr>
-            <a:lvl7pPr marR="0" lvl="6" algn="l" rtl="0">
-              <a:lnSpc>
-                <a:spcPct val="100000"/>
-              </a:lnSpc>
-              <a:spcBef>
-                <a:spcPts val="0"/>
-              </a:spcBef>
-              <a:spcAft>
-                <a:spcPts val="0"/>
-              </a:spcAft>
-              <a:buClr>
-                <a:srgbClr val="000000"/>
-              </a:buClr>
-              <a:buFont typeface="Arial"/>
-              <a:defRPr sz="1400" b="0" i="0" u="none" strike="noStrike" cap="none">
-                <a:solidFill>
-                  <a:srgbClr val="000000"/>
-                </a:solidFill>
-                <a:latin typeface="Arial"/>
-                <a:ea typeface="Arial"/>
-                <a:cs typeface="Arial"/>
-                <a:sym typeface="Arial"/>
-              </a:defRPr>
-            </a:lvl7pPr>
-            <a:lvl8pPr marR="0" lvl="7" algn="l" rtl="0">
-              <a:lnSpc>
-                <a:spcPct val="100000"/>
-              </a:lnSpc>
-              <a:spcBef>
-                <a:spcPts val="0"/>
-              </a:spcBef>
-              <a:spcAft>
-                <a:spcPts val="0"/>
-              </a:spcAft>
-              <a:buClr>
-                <a:srgbClr val="000000"/>
-              </a:buClr>
-              <a:buFont typeface="Arial"/>
-              <a:defRPr sz="1400" b="0" i="0" u="none" strike="noStrike" cap="none">
-                <a:solidFill>
-                  <a:srgbClr val="000000"/>
-                </a:solidFill>
-                <a:latin typeface="Arial"/>
-                <a:ea typeface="Arial"/>
-                <a:cs typeface="Arial"/>
-                <a:sym typeface="Arial"/>
-              </a:defRPr>
-            </a:lvl8pPr>
-            <a:lvl9pPr marR="0" lvl="8" algn="l" rtl="0">
-              <a:lnSpc>
-                <a:spcPct val="100000"/>
-              </a:lnSpc>
-              <a:spcBef>
-                <a:spcPts val="0"/>
-              </a:spcBef>
-              <a:spcAft>
-                <a:spcPts val="0"/>
-              </a:spcAft>
-              <a:buClr>
-                <a:srgbClr val="000000"/>
-              </a:buClr>
-              <a:buFont typeface="Arial"/>
-              <a:defRPr sz="1400" b="0" i="0" u="none" strike="noStrike" cap="none">
-                <a:solidFill>
-                  <a:srgbClr val="000000"/>
-                </a:solidFill>
-                <a:latin typeface="Arial"/>
-                <a:ea typeface="Arial"/>
-                <a:cs typeface="Arial"/>
-                <a:sym typeface="Arial"/>
-              </a:defRPr>
-            </a:lvl9pPr>
-          </a:lstStyle>
-          <a:p>
-            <a:r>
-              <a:rPr lang="en-US" sz="3450" dirty="0">
-                <a:latin typeface="Times New Roman" panose="02020603050405020304" pitchFamily="18" charset="0"/>
-                <a:cs typeface="Times New Roman" panose="02020603050405020304" pitchFamily="18" charset="0"/>
-              </a:rPr>
-              <a:t>Ensemble via soft voting + stacking</a:t>
-            </a:r>
-          </a:p>
-        </p:txBody>
-      </p:sp>
-      <p:sp>
-        <p:nvSpPr>
-          <p:cNvPr id="3" name="Google Shape;267;p37">
-            <a:extLst>
-              <a:ext uri="{FF2B5EF4-FFF2-40B4-BE49-F238E27FC236}">
-                <a16:creationId xmlns:a16="http://schemas.microsoft.com/office/drawing/2014/main" id="{07BB110E-9C70-EE7B-E64A-2D71914D94B6}"/>
-              </a:ext>
-            </a:extLst>
-          </p:cNvPr>
-          <p:cNvSpPr txBox="1">
-            <a:spLocks/>
-          </p:cNvSpPr>
-          <p:nvPr/>
-        </p:nvSpPr>
-        <p:spPr>
-          <a:xfrm>
-            <a:off x="334256" y="2733331"/>
-            <a:ext cx="3837000" cy="1671928"/>
-          </a:xfrm>
-          <a:prstGeom prst="rect">
-            <a:avLst/>
-          </a:prstGeom>
-          <a:noFill/>
-          <a:ln>
-            <a:noFill/>
-          </a:ln>
-        </p:spPr>
-        <p:txBody>
-          <a:bodyPr spcFirstLastPara="1" wrap="square" lIns="91425" tIns="91425" rIns="91425" bIns="91425" anchor="t" anchorCtr="0">
-            <a:noAutofit/>
-          </a:bodyPr>
-          <a:lstStyle>
-            <a:defPPr marR="0" lvl="0" algn="l" rtl="0">
-              <a:lnSpc>
-                <a:spcPct val="100000"/>
-              </a:lnSpc>
-              <a:spcBef>
-                <a:spcPts val="0"/>
-              </a:spcBef>
-              <a:spcAft>
-                <a:spcPts val="0"/>
-              </a:spcAft>
-            </a:defPPr>
-            <a:lvl1pPr marL="457200" marR="0" lvl="0" indent="-279400" algn="r" rtl="0">
-              <a:lnSpc>
-                <a:spcPct val="115000"/>
-              </a:lnSpc>
-              <a:spcBef>
-                <a:spcPts val="0"/>
-              </a:spcBef>
-              <a:spcAft>
-                <a:spcPts val="0"/>
-              </a:spcAft>
-              <a:buClr>
-                <a:schemeClr val="dk1"/>
-              </a:buClr>
-              <a:buSzPts val="800"/>
-              <a:buFont typeface="DM Sans"/>
-              <a:buChar char="●"/>
-              <a:defRPr sz="800" b="0" i="0" u="none" strike="noStrike" cap="none">
-                <a:solidFill>
-                  <a:schemeClr val="dk1"/>
-                </a:solidFill>
-                <a:latin typeface="DM Sans"/>
-                <a:ea typeface="DM Sans"/>
-                <a:cs typeface="DM Sans"/>
-                <a:sym typeface="DM Sans"/>
-              </a:defRPr>
-            </a:lvl1pPr>
-            <a:lvl2pPr marL="914400" marR="0" lvl="1" indent="-279400" algn="r" rtl="0">
-              <a:lnSpc>
-                <a:spcPct val="115000"/>
-              </a:lnSpc>
-              <a:spcBef>
-                <a:spcPts val="0"/>
-              </a:spcBef>
-              <a:spcAft>
-                <a:spcPts val="0"/>
-              </a:spcAft>
-              <a:buClr>
-                <a:schemeClr val="dk1"/>
-              </a:buClr>
-              <a:buSzPts val="800"/>
-              <a:buFont typeface="DM Sans"/>
-              <a:buChar char="○"/>
-              <a:defRPr sz="800" b="0" i="0" u="none" strike="noStrike" cap="none">
-                <a:solidFill>
-                  <a:schemeClr val="dk1"/>
-                </a:solidFill>
-                <a:latin typeface="DM Sans"/>
-                <a:ea typeface="DM Sans"/>
-                <a:cs typeface="DM Sans"/>
-                <a:sym typeface="DM Sans"/>
-              </a:defRPr>
-            </a:lvl2pPr>
-            <a:lvl3pPr marL="1371600" marR="0" lvl="2" indent="-279400" algn="r" rtl="0">
-              <a:lnSpc>
-                <a:spcPct val="115000"/>
-              </a:lnSpc>
-              <a:spcBef>
-                <a:spcPts val="0"/>
-              </a:spcBef>
-              <a:spcAft>
-                <a:spcPts val="0"/>
-              </a:spcAft>
-              <a:buClr>
-                <a:schemeClr val="dk1"/>
-              </a:buClr>
-              <a:buSzPts val="800"/>
-              <a:buFont typeface="DM Sans"/>
-              <a:buChar char="■"/>
-              <a:defRPr sz="800" b="0" i="0" u="none" strike="noStrike" cap="none">
-                <a:solidFill>
-                  <a:schemeClr val="dk1"/>
-                </a:solidFill>
-                <a:latin typeface="DM Sans"/>
-                <a:ea typeface="DM Sans"/>
-                <a:cs typeface="DM Sans"/>
-                <a:sym typeface="DM Sans"/>
-              </a:defRPr>
-            </a:lvl3pPr>
-            <a:lvl4pPr marL="1828800" marR="0" lvl="3" indent="-279400" algn="r" rtl="0">
-              <a:lnSpc>
-                <a:spcPct val="115000"/>
-              </a:lnSpc>
-              <a:spcBef>
-                <a:spcPts val="0"/>
-              </a:spcBef>
-              <a:spcAft>
-                <a:spcPts val="0"/>
-              </a:spcAft>
-              <a:buClr>
-                <a:schemeClr val="dk1"/>
-              </a:buClr>
-              <a:buSzPts val="800"/>
-              <a:buFont typeface="DM Sans"/>
-              <a:buChar char="●"/>
-              <a:defRPr sz="800" b="0" i="0" u="none" strike="noStrike" cap="none">
-                <a:solidFill>
-                  <a:schemeClr val="dk1"/>
-                </a:solidFill>
-                <a:latin typeface="DM Sans"/>
-                <a:ea typeface="DM Sans"/>
-                <a:cs typeface="DM Sans"/>
-                <a:sym typeface="DM Sans"/>
-              </a:defRPr>
-            </a:lvl4pPr>
-            <a:lvl5pPr marL="2286000" marR="0" lvl="4" indent="-279400" algn="r" rtl="0">
-              <a:lnSpc>
-                <a:spcPct val="115000"/>
-              </a:lnSpc>
-              <a:spcBef>
-                <a:spcPts val="0"/>
-              </a:spcBef>
-              <a:spcAft>
-                <a:spcPts val="0"/>
-              </a:spcAft>
-              <a:buClr>
-                <a:schemeClr val="dk1"/>
-              </a:buClr>
-              <a:buSzPts val="800"/>
-              <a:buFont typeface="DM Sans"/>
-              <a:buChar char="○"/>
-              <a:defRPr sz="800" b="0" i="0" u="none" strike="noStrike" cap="none">
-                <a:solidFill>
-                  <a:schemeClr val="dk1"/>
-                </a:solidFill>
-                <a:latin typeface="DM Sans"/>
-                <a:ea typeface="DM Sans"/>
-                <a:cs typeface="DM Sans"/>
-                <a:sym typeface="DM Sans"/>
-              </a:defRPr>
-            </a:lvl5pPr>
-            <a:lvl6pPr marL="2743200" marR="0" lvl="5" indent="-279400" algn="r" rtl="0">
-              <a:lnSpc>
-                <a:spcPct val="115000"/>
-              </a:lnSpc>
-              <a:spcBef>
-                <a:spcPts val="0"/>
-              </a:spcBef>
-              <a:spcAft>
-                <a:spcPts val="0"/>
-              </a:spcAft>
-              <a:buClr>
-                <a:schemeClr val="dk1"/>
-              </a:buClr>
-              <a:buSzPts val="800"/>
-              <a:buFont typeface="DM Sans"/>
-              <a:buChar char="■"/>
-              <a:defRPr sz="800" b="0" i="0" u="none" strike="noStrike" cap="none">
-                <a:solidFill>
-                  <a:schemeClr val="dk1"/>
-                </a:solidFill>
-                <a:latin typeface="DM Sans"/>
-                <a:ea typeface="DM Sans"/>
-                <a:cs typeface="DM Sans"/>
-                <a:sym typeface="DM Sans"/>
-              </a:defRPr>
-            </a:lvl6pPr>
-            <a:lvl7pPr marL="3200400" marR="0" lvl="6" indent="-279400" algn="r" rtl="0">
-              <a:lnSpc>
-                <a:spcPct val="115000"/>
-              </a:lnSpc>
-              <a:spcBef>
-                <a:spcPts val="0"/>
-              </a:spcBef>
-              <a:spcAft>
-                <a:spcPts val="0"/>
-              </a:spcAft>
-              <a:buClr>
-                <a:schemeClr val="dk1"/>
-              </a:buClr>
-              <a:buSzPts val="800"/>
-              <a:buFont typeface="DM Sans"/>
-              <a:buChar char="●"/>
-              <a:defRPr sz="800" b="0" i="0" u="none" strike="noStrike" cap="none">
-                <a:solidFill>
-                  <a:schemeClr val="dk1"/>
-                </a:solidFill>
-                <a:latin typeface="DM Sans"/>
-                <a:ea typeface="DM Sans"/>
-                <a:cs typeface="DM Sans"/>
-                <a:sym typeface="DM Sans"/>
-              </a:defRPr>
-            </a:lvl7pPr>
-            <a:lvl8pPr marL="3657600" marR="0" lvl="7" indent="-279400" algn="r" rtl="0">
-              <a:lnSpc>
-                <a:spcPct val="115000"/>
-              </a:lnSpc>
-              <a:spcBef>
-                <a:spcPts val="0"/>
-              </a:spcBef>
-              <a:spcAft>
-                <a:spcPts val="0"/>
-              </a:spcAft>
-              <a:buClr>
-                <a:schemeClr val="dk1"/>
-              </a:buClr>
-              <a:buSzPts val="800"/>
-              <a:buFont typeface="DM Sans"/>
-              <a:buChar char="○"/>
-              <a:defRPr sz="800" b="0" i="0" u="none" strike="noStrike" cap="none">
-                <a:solidFill>
-                  <a:schemeClr val="dk1"/>
-                </a:solidFill>
-                <a:latin typeface="DM Sans"/>
-                <a:ea typeface="DM Sans"/>
-                <a:cs typeface="DM Sans"/>
-                <a:sym typeface="DM Sans"/>
-              </a:defRPr>
-            </a:lvl8pPr>
-            <a:lvl9pPr marL="4114800" marR="0" lvl="8" indent="-279400" algn="r" rtl="0">
-              <a:lnSpc>
-                <a:spcPct val="115000"/>
-              </a:lnSpc>
-              <a:spcBef>
-                <a:spcPts val="0"/>
-              </a:spcBef>
-              <a:spcAft>
-                <a:spcPts val="0"/>
-              </a:spcAft>
-              <a:buClr>
-                <a:schemeClr val="dk1"/>
-              </a:buClr>
-              <a:buSzPts val="800"/>
-              <a:buFont typeface="DM Sans"/>
-              <a:buChar char="■"/>
-              <a:defRPr sz="800" b="0" i="0" u="none" strike="noStrike" cap="none">
-                <a:solidFill>
-                  <a:schemeClr val="dk1"/>
-                </a:solidFill>
-                <a:latin typeface="DM Sans"/>
-                <a:ea typeface="DM Sans"/>
-                <a:cs typeface="DM Sans"/>
-                <a:sym typeface="DM Sans"/>
-              </a:defRPr>
-            </a:lvl9pPr>
-          </a:lstStyle>
-          <a:p>
-            <a:pPr marL="0" indent="0" algn="l">
-              <a:spcAft>
-                <a:spcPts val="1200"/>
-              </a:spcAft>
-              <a:buClr>
-                <a:schemeClr val="accent3"/>
-              </a:buClr>
-              <a:buSzPts val="1100"/>
-              <a:buFont typeface="Arial"/>
-              <a:buNone/>
-            </a:pPr>
-            <a:r>
-              <a:rPr lang="en-US" sz="1600">
-                <a:solidFill>
-                  <a:schemeClr val="hlink"/>
-                </a:solidFill>
-                <a:latin typeface="Times New Roman"/>
-                <a:ea typeface="Times New Roman"/>
-                <a:cs typeface="Times New Roman"/>
-                <a:sym typeface="Times New Roman"/>
-              </a:rPr>
-              <a:t>Ensemble models outperform single classifiers in AUC and AUPR, providing more reliable predictions.</a:t>
-            </a:r>
-            <a:endParaRPr lang="en-US" sz="1100" dirty="0"/>
-          </a:p>
-        </p:txBody>
-      </p:sp>
-      <p:sp>
-        <p:nvSpPr>
-          <p:cNvPr id="4" name="Google Shape;265;p37">
-            <a:extLst>
-              <a:ext uri="{FF2B5EF4-FFF2-40B4-BE49-F238E27FC236}">
-                <a16:creationId xmlns:a16="http://schemas.microsoft.com/office/drawing/2014/main" id="{2D26676D-FF55-2F0C-DD3C-B4D31A238937}"/>
-              </a:ext>
-            </a:extLst>
-          </p:cNvPr>
-          <p:cNvSpPr txBox="1">
-            <a:spLocks noGrp="1"/>
-          </p:cNvSpPr>
-          <p:nvPr>
-            <p:ph type="sldNum" idx="12"/>
-          </p:nvPr>
-        </p:nvSpPr>
-        <p:spPr>
-          <a:xfrm>
-            <a:off x="8472458" y="4663217"/>
-            <a:ext cx="548700" cy="393600"/>
-          </a:xfrm>
-          <a:prstGeom prst="rect">
-            <a:avLst/>
-          </a:prstGeom>
-        </p:spPr>
-        <p:txBody>
-          <a:bodyPr spcFirstLastPara="1" wrap="square" lIns="91425" tIns="91425" rIns="91425" bIns="91425" anchor="ctr" anchorCtr="0">
-            <a:normAutofit/>
-          </a:bodyPr>
-          <a:lstStyle/>
-          <a:p>
-            <a:pPr marL="0" lvl="0" indent="0" algn="r" rtl="0">
-              <a:spcBef>
-                <a:spcPts val="0"/>
-              </a:spcBef>
-              <a:spcAft>
-                <a:spcPts val="0"/>
-              </a:spcAft>
-              <a:buNone/>
-            </a:pPr>
-            <a:fld id="{00000000-1234-1234-1234-123412341234}" type="slidenum">
-              <a:rPr lang="en"/>
-              <a:t>6</a:t>
-            </a:fld>
-            <a:endParaRPr/>
-          </a:p>
-        </p:txBody>
-      </p:sp>
-      <p:pic>
-        <p:nvPicPr>
-          <p:cNvPr id="5" name="Google Shape;269;p37">
-            <a:extLst>
-              <a:ext uri="{FF2B5EF4-FFF2-40B4-BE49-F238E27FC236}">
-                <a16:creationId xmlns:a16="http://schemas.microsoft.com/office/drawing/2014/main" id="{DD0DF778-60C6-96D6-BFAF-5AD863EB6C08}"/>
-              </a:ext>
-            </a:extLst>
-          </p:cNvPr>
-          <p:cNvPicPr preferRelativeResize="0"/>
-          <p:nvPr/>
-        </p:nvPicPr>
-        <p:blipFill>
-          <a:blip r:embed="rId3">
-            <a:alphaModFix/>
-          </a:blip>
-          <a:stretch>
-            <a:fillRect/>
-          </a:stretch>
-        </p:blipFill>
-        <p:spPr>
-          <a:xfrm>
-            <a:off x="4280436" y="1271910"/>
-            <a:ext cx="4574000" cy="2665834"/>
-          </a:xfrm>
-          <a:prstGeom prst="rect">
-            <a:avLst/>
-          </a:prstGeom>
-          <a:noFill/>
-          <a:ln>
-            <a:noFill/>
-          </a:ln>
-        </p:spPr>
-      </p:pic>
-    </p:spTree>
-    <p:extLst>
-      <p:ext uri="{BB962C8B-B14F-4D97-AF65-F5344CB8AC3E}">
-        <p14:creationId xmlns:p14="http://schemas.microsoft.com/office/powerpoint/2010/main" val="3266907895"/>
-      </p:ext>
-    </p:extLst>
-  </p:cSld>
-  <p:clrMapOvr>
-    <a:masterClrMapping/>
-  </p:clrMapOvr>
-</p:sld>
-</file>
-
-<file path=ppt/slides/slide7.xml><?xml version="1.0" encoding="utf-8"?>
-<p:sld xmlns:a="http://schemas.openxmlformats.org/drawingml/2006/main" xmlns:r="http://schemas.openxmlformats.org/officeDocument/2006/relationships" xmlns:p="http://schemas.openxmlformats.org/presentationml/2006/main" showMasterSp="0">
-  <p:cSld>
-    <p:spTree>
-      <p:nvGrpSpPr>
-        <p:cNvPr id="1" name="Shape 256">
-          <a:extLst>
-            <a:ext uri="{FF2B5EF4-FFF2-40B4-BE49-F238E27FC236}">
-              <a16:creationId xmlns:a16="http://schemas.microsoft.com/office/drawing/2014/main" id="{F33EFBC6-4324-77A6-C6A6-6A8EF71065CD}"/>
-            </a:ext>
-          </a:extLst>
-        </p:cNvPr>
-        <p:cNvGrpSpPr/>
-        <p:nvPr/>
-      </p:nvGrpSpPr>
-      <p:grpSpPr>
-        <a:xfrm>
-          <a:off x="0" y="0"/>
-          <a:ext cx="0" cy="0"/>
-          <a:chOff x="0" y="0"/>
-          <a:chExt cx="0" cy="0"/>
-        </a:xfrm>
-      </p:grpSpPr>
-      <p:sp>
-        <p:nvSpPr>
-          <p:cNvPr id="258" name="Google Shape;258;p36">
-            <a:extLst>
-              <a:ext uri="{FF2B5EF4-FFF2-40B4-BE49-F238E27FC236}">
-                <a16:creationId xmlns:a16="http://schemas.microsoft.com/office/drawing/2014/main" id="{9E4BF3B0-7C0F-3FCF-0413-0D3DC71CE79E}"/>
-              </a:ext>
-            </a:extLst>
-          </p:cNvPr>
-          <p:cNvSpPr txBox="1">
-            <a:spLocks noGrp="1"/>
-          </p:cNvSpPr>
-          <p:nvPr>
-            <p:ph type="body" idx="2"/>
-          </p:nvPr>
-        </p:nvSpPr>
-        <p:spPr>
-          <a:xfrm>
-            <a:off x="6452200" y="196725"/>
-            <a:ext cx="2569200" cy="209100"/>
-          </a:xfrm>
-          <a:prstGeom prst="rect">
-            <a:avLst/>
-          </a:prstGeom>
-        </p:spPr>
-        <p:txBody>
-          <a:bodyPr spcFirstLastPara="1" wrap="square" lIns="91425" tIns="91425" rIns="91425" bIns="91425" anchor="ctr" anchorCtr="0">
-            <a:noAutofit/>
-          </a:bodyPr>
-          <a:lstStyle/>
-          <a:p>
-            <a:pPr marL="0" lvl="0" indent="0" algn="r" rtl="0">
-              <a:spcBef>
-                <a:spcPts val="0"/>
-              </a:spcBef>
-              <a:spcAft>
-                <a:spcPts val="1200"/>
-              </a:spcAft>
-              <a:buNone/>
-            </a:pPr>
-            <a:r>
-              <a:rPr lang="en" dirty="0"/>
-              <a:t>CSYE 7380 - Theory &amp; Prac App AI Gen Model College of Engineering, Northeastern University </a:t>
-            </a:r>
-            <a:endParaRPr dirty="0"/>
-          </a:p>
-        </p:txBody>
-      </p:sp>
-      <p:sp>
-        <p:nvSpPr>
-          <p:cNvPr id="4" name="Google Shape;265;p37">
-            <a:extLst>
-              <a:ext uri="{FF2B5EF4-FFF2-40B4-BE49-F238E27FC236}">
-                <a16:creationId xmlns:a16="http://schemas.microsoft.com/office/drawing/2014/main" id="{5AED276C-BA49-B7BB-8C69-4359093548C1}"/>
-              </a:ext>
-            </a:extLst>
-          </p:cNvPr>
-          <p:cNvSpPr txBox="1">
-            <a:spLocks noGrp="1"/>
-          </p:cNvSpPr>
-          <p:nvPr>
-            <p:ph type="sldNum" idx="12"/>
-          </p:nvPr>
-        </p:nvSpPr>
-        <p:spPr>
-          <a:xfrm>
-            <a:off x="8472458" y="4663217"/>
-            <a:ext cx="548700" cy="393600"/>
-          </a:xfrm>
-          <a:prstGeom prst="rect">
-            <a:avLst/>
-          </a:prstGeom>
-        </p:spPr>
-        <p:txBody>
-          <a:bodyPr spcFirstLastPara="1" wrap="square" lIns="91425" tIns="91425" rIns="91425" bIns="91425" anchor="ctr" anchorCtr="0">
-            <a:normAutofit/>
-          </a:bodyPr>
-          <a:lstStyle/>
-          <a:p>
-            <a:pPr marL="0" lvl="0" indent="0" algn="r" rtl="0">
-              <a:spcBef>
-                <a:spcPts val="0"/>
-              </a:spcBef>
-              <a:spcAft>
-                <a:spcPts val="0"/>
-              </a:spcAft>
-              <a:buNone/>
-            </a:pPr>
-            <a:fld id="{00000000-1234-1234-1234-123412341234}" type="slidenum">
-              <a:rPr lang="en"/>
-              <a:t>7</a:t>
-            </a:fld>
-            <a:endParaRPr/>
-          </a:p>
-        </p:txBody>
-      </p:sp>
-      <p:pic>
-        <p:nvPicPr>
-          <p:cNvPr id="6" name="Google Shape;278;p38">
-            <a:extLst>
-              <a:ext uri="{FF2B5EF4-FFF2-40B4-BE49-F238E27FC236}">
-                <a16:creationId xmlns:a16="http://schemas.microsoft.com/office/drawing/2014/main" id="{F86C7BC3-38C1-62EF-11F6-90C3956693B0}"/>
-              </a:ext>
-            </a:extLst>
-          </p:cNvPr>
-          <p:cNvPicPr preferRelativeResize="0"/>
-          <p:nvPr/>
-        </p:nvPicPr>
-        <p:blipFill>
-          <a:blip r:embed="rId3">
-            <a:alphaModFix/>
-          </a:blip>
-          <a:stretch>
-            <a:fillRect/>
-          </a:stretch>
-        </p:blipFill>
-        <p:spPr>
-          <a:xfrm>
-            <a:off x="4208490" y="1876225"/>
-            <a:ext cx="4406824" cy="1689300"/>
-          </a:xfrm>
-          <a:prstGeom prst="rect">
-            <a:avLst/>
-          </a:prstGeom>
-          <a:noFill/>
-          <a:ln>
-            <a:noFill/>
-          </a:ln>
-        </p:spPr>
-      </p:pic>
-      <p:sp>
-        <p:nvSpPr>
-          <p:cNvPr id="7" name="Google Shape;275;p38">
-            <a:extLst>
-              <a:ext uri="{FF2B5EF4-FFF2-40B4-BE49-F238E27FC236}">
-                <a16:creationId xmlns:a16="http://schemas.microsoft.com/office/drawing/2014/main" id="{7FF30E00-4359-E460-E08D-7370FE188D9B}"/>
-              </a:ext>
-            </a:extLst>
-          </p:cNvPr>
-          <p:cNvSpPr txBox="1">
-            <a:spLocks/>
-          </p:cNvSpPr>
-          <p:nvPr/>
-        </p:nvSpPr>
-        <p:spPr>
-          <a:xfrm>
-            <a:off x="459935" y="678050"/>
-            <a:ext cx="3510487" cy="1632900"/>
-          </a:xfrm>
-          <a:prstGeom prst="rect">
-            <a:avLst/>
-          </a:prstGeom>
-        </p:spPr>
-        <p:txBody>
-          <a:bodyPr spcFirstLastPara="1" wrap="square" lIns="91425" tIns="91425" rIns="91425" bIns="91425" anchor="b" anchorCtr="0">
-            <a:noAutofit/>
-          </a:bodyPr>
-          <a:lstStyle>
-            <a:defPPr marR="0" lvl="0" algn="l" rtl="0">
-              <a:lnSpc>
-                <a:spcPct val="100000"/>
-              </a:lnSpc>
-              <a:spcBef>
-                <a:spcPts val="0"/>
-              </a:spcBef>
-              <a:spcAft>
-                <a:spcPts val="0"/>
-              </a:spcAft>
-            </a:defPPr>
-            <a:lvl1pPr marR="0" lvl="0" algn="l" rtl="0">
-              <a:lnSpc>
-                <a:spcPct val="100000"/>
-              </a:lnSpc>
-              <a:spcBef>
-                <a:spcPts val="0"/>
-              </a:spcBef>
-              <a:spcAft>
-                <a:spcPts val="0"/>
-              </a:spcAft>
-              <a:buClr>
-                <a:srgbClr val="000000"/>
-              </a:buClr>
-              <a:buFont typeface="Arial"/>
-              <a:defRPr sz="1400" b="0" i="0" u="none" strike="noStrike" cap="none">
-                <a:solidFill>
-                  <a:srgbClr val="000000"/>
-                </a:solidFill>
-                <a:latin typeface="Arial"/>
-                <a:ea typeface="Arial"/>
-                <a:cs typeface="Arial"/>
-                <a:sym typeface="Arial"/>
-              </a:defRPr>
-            </a:lvl1pPr>
-            <a:lvl2pPr marR="0" lvl="1" algn="l" rtl="0">
-              <a:lnSpc>
-                <a:spcPct val="100000"/>
-              </a:lnSpc>
-              <a:spcBef>
-                <a:spcPts val="0"/>
-              </a:spcBef>
-              <a:spcAft>
-                <a:spcPts val="0"/>
-              </a:spcAft>
-              <a:buClr>
-                <a:srgbClr val="000000"/>
-              </a:buClr>
-              <a:buFont typeface="Arial"/>
-              <a:defRPr sz="1400" b="0" i="0" u="none" strike="noStrike" cap="none">
-                <a:solidFill>
-                  <a:srgbClr val="000000"/>
-                </a:solidFill>
-                <a:latin typeface="Arial"/>
-                <a:ea typeface="Arial"/>
-                <a:cs typeface="Arial"/>
-                <a:sym typeface="Arial"/>
-              </a:defRPr>
-            </a:lvl2pPr>
-            <a:lvl3pPr marR="0" lvl="2" algn="l" rtl="0">
-              <a:lnSpc>
-                <a:spcPct val="100000"/>
-              </a:lnSpc>
-              <a:spcBef>
-                <a:spcPts val="0"/>
-              </a:spcBef>
-              <a:spcAft>
-                <a:spcPts val="0"/>
-              </a:spcAft>
-              <a:buClr>
-                <a:srgbClr val="000000"/>
-              </a:buClr>
-              <a:buFont typeface="Arial"/>
-              <a:defRPr sz="1400" b="0" i="0" u="none" strike="noStrike" cap="none">
-                <a:solidFill>
-                  <a:srgbClr val="000000"/>
-                </a:solidFill>
-                <a:latin typeface="Arial"/>
-                <a:ea typeface="Arial"/>
-                <a:cs typeface="Arial"/>
-                <a:sym typeface="Arial"/>
-              </a:defRPr>
-            </a:lvl3pPr>
-            <a:lvl4pPr marR="0" lvl="3" algn="l" rtl="0">
-              <a:lnSpc>
-                <a:spcPct val="100000"/>
-              </a:lnSpc>
-              <a:spcBef>
-                <a:spcPts val="0"/>
-              </a:spcBef>
-              <a:spcAft>
-                <a:spcPts val="0"/>
-              </a:spcAft>
-              <a:buClr>
-                <a:srgbClr val="000000"/>
-              </a:buClr>
-              <a:buFont typeface="Arial"/>
-              <a:defRPr sz="1400" b="0" i="0" u="none" strike="noStrike" cap="none">
-                <a:solidFill>
-                  <a:srgbClr val="000000"/>
-                </a:solidFill>
-                <a:latin typeface="Arial"/>
-                <a:ea typeface="Arial"/>
-                <a:cs typeface="Arial"/>
-                <a:sym typeface="Arial"/>
-              </a:defRPr>
-            </a:lvl4pPr>
-            <a:lvl5pPr marR="0" lvl="4" algn="l" rtl="0">
-              <a:lnSpc>
-                <a:spcPct val="100000"/>
-              </a:lnSpc>
-              <a:spcBef>
-                <a:spcPts val="0"/>
-              </a:spcBef>
-              <a:spcAft>
-                <a:spcPts val="0"/>
-              </a:spcAft>
-              <a:buClr>
-                <a:srgbClr val="000000"/>
-              </a:buClr>
-              <a:buFont typeface="Arial"/>
-              <a:defRPr sz="1400" b="0" i="0" u="none" strike="noStrike" cap="none">
-                <a:solidFill>
-                  <a:srgbClr val="000000"/>
-                </a:solidFill>
-                <a:latin typeface="Arial"/>
-                <a:ea typeface="Arial"/>
-                <a:cs typeface="Arial"/>
-                <a:sym typeface="Arial"/>
-              </a:defRPr>
-            </a:lvl5pPr>
-            <a:lvl6pPr marR="0" lvl="5" algn="l" rtl="0">
-              <a:lnSpc>
-                <a:spcPct val="100000"/>
-              </a:lnSpc>
-              <a:spcBef>
-                <a:spcPts val="0"/>
-              </a:spcBef>
-              <a:spcAft>
-                <a:spcPts val="0"/>
-              </a:spcAft>
-              <a:buClr>
-                <a:srgbClr val="000000"/>
-              </a:buClr>
-              <a:buFont typeface="Arial"/>
-              <a:defRPr sz="1400" b="0" i="0" u="none" strike="noStrike" cap="none">
-                <a:solidFill>
-                  <a:srgbClr val="000000"/>
-                </a:solidFill>
-                <a:latin typeface="Arial"/>
-                <a:ea typeface="Arial"/>
-                <a:cs typeface="Arial"/>
-                <a:sym typeface="Arial"/>
-              </a:defRPr>
-            </a:lvl6pPr>
-            <a:lvl7pPr marR="0" lvl="6" algn="l" rtl="0">
-              <a:lnSpc>
-                <a:spcPct val="100000"/>
-              </a:lnSpc>
-              <a:spcBef>
-                <a:spcPts val="0"/>
-              </a:spcBef>
-              <a:spcAft>
-                <a:spcPts val="0"/>
-              </a:spcAft>
-              <a:buClr>
-                <a:srgbClr val="000000"/>
-              </a:buClr>
-              <a:buFont typeface="Arial"/>
-              <a:defRPr sz="1400" b="0" i="0" u="none" strike="noStrike" cap="none">
-                <a:solidFill>
-                  <a:srgbClr val="000000"/>
-                </a:solidFill>
-                <a:latin typeface="Arial"/>
-                <a:ea typeface="Arial"/>
-                <a:cs typeface="Arial"/>
-                <a:sym typeface="Arial"/>
-              </a:defRPr>
-            </a:lvl7pPr>
-            <a:lvl8pPr marR="0" lvl="7" algn="l" rtl="0">
-              <a:lnSpc>
-                <a:spcPct val="100000"/>
-              </a:lnSpc>
-              <a:spcBef>
-                <a:spcPts val="0"/>
-              </a:spcBef>
-              <a:spcAft>
-                <a:spcPts val="0"/>
-              </a:spcAft>
-              <a:buClr>
-                <a:srgbClr val="000000"/>
-              </a:buClr>
-              <a:buFont typeface="Arial"/>
-              <a:defRPr sz="1400" b="0" i="0" u="none" strike="noStrike" cap="none">
-                <a:solidFill>
-                  <a:srgbClr val="000000"/>
-                </a:solidFill>
-                <a:latin typeface="Arial"/>
-                <a:ea typeface="Arial"/>
-                <a:cs typeface="Arial"/>
-                <a:sym typeface="Arial"/>
-              </a:defRPr>
-            </a:lvl8pPr>
-            <a:lvl9pPr marR="0" lvl="8" algn="l" rtl="0">
-              <a:lnSpc>
-                <a:spcPct val="100000"/>
-              </a:lnSpc>
-              <a:spcBef>
-                <a:spcPts val="0"/>
-              </a:spcBef>
-              <a:spcAft>
-                <a:spcPts val="0"/>
-              </a:spcAft>
-              <a:buClr>
-                <a:srgbClr val="000000"/>
-              </a:buClr>
-              <a:buFont typeface="Arial"/>
-              <a:defRPr sz="1400" b="0" i="0" u="none" strike="noStrike" cap="none">
-                <a:solidFill>
-                  <a:srgbClr val="000000"/>
-                </a:solidFill>
-                <a:latin typeface="Arial"/>
-                <a:ea typeface="Arial"/>
-                <a:cs typeface="Arial"/>
-                <a:sym typeface="Arial"/>
-              </a:defRPr>
-            </a:lvl9pPr>
-          </a:lstStyle>
-          <a:p>
-            <a:r>
-              <a:rPr lang="en-US" sz="3450" dirty="0">
-                <a:latin typeface="Times New Roman" panose="02020603050405020304" pitchFamily="18" charset="0"/>
-                <a:cs typeface="Times New Roman" panose="02020603050405020304" pitchFamily="18" charset="0"/>
-              </a:rPr>
-              <a:t>SMOTE for Class Balancing</a:t>
-            </a:r>
-          </a:p>
-        </p:txBody>
-      </p:sp>
-      <p:sp>
-        <p:nvSpPr>
-          <p:cNvPr id="8" name="Google Shape;276;p38">
-            <a:extLst>
-              <a:ext uri="{FF2B5EF4-FFF2-40B4-BE49-F238E27FC236}">
-                <a16:creationId xmlns:a16="http://schemas.microsoft.com/office/drawing/2014/main" id="{64D0C397-E00F-8D5D-9257-34DFCE81898C}"/>
-              </a:ext>
-            </a:extLst>
-          </p:cNvPr>
-          <p:cNvSpPr txBox="1">
-            <a:spLocks noGrp="1"/>
-          </p:cNvSpPr>
-          <p:nvPr>
-            <p:ph type="body" idx="1"/>
-          </p:nvPr>
-        </p:nvSpPr>
-        <p:spPr>
-          <a:xfrm>
-            <a:off x="489572" y="2345325"/>
-            <a:ext cx="3510486" cy="2118509"/>
-          </a:xfrm>
-          <a:prstGeom prst="rect">
-            <a:avLst/>
-          </a:prstGeom>
-        </p:spPr>
-        <p:txBody>
-          <a:bodyPr spcFirstLastPara="1" wrap="square" lIns="91425" tIns="91425" rIns="91425" bIns="91425" anchor="t" anchorCtr="0">
-            <a:noAutofit/>
-          </a:bodyPr>
-          <a:lstStyle/>
-          <a:p>
-            <a:pPr marL="0" lvl="0" indent="0" algn="l" rtl="0">
-              <a:lnSpc>
-                <a:spcPct val="115000"/>
-              </a:lnSpc>
-              <a:spcBef>
-                <a:spcPts val="1200"/>
-              </a:spcBef>
-              <a:spcAft>
-                <a:spcPts val="1200"/>
-              </a:spcAft>
-              <a:buClr>
-                <a:schemeClr val="hlink"/>
-              </a:buClr>
-              <a:buSzPts val="1100"/>
-              <a:buFont typeface="Arial"/>
-              <a:buNone/>
-            </a:pPr>
-            <a:r>
-              <a:rPr lang="en" sz="1600" dirty="0">
-                <a:solidFill>
-                  <a:schemeClr val="hlink"/>
-                </a:solidFill>
-                <a:latin typeface="Times New Roman"/>
-                <a:ea typeface="Times New Roman"/>
-                <a:cs typeface="Times New Roman"/>
-                <a:sym typeface="Times New Roman"/>
-              </a:rPr>
-              <a:t>SMOTE (Synthetic Minority Over-sampling Technique) helps balance the dataset by generating synthetic samples for the minority class, improving model performance on imbalanced data.</a:t>
-            </a:r>
-            <a:endParaRPr sz="1600" dirty="0">
-              <a:solidFill>
-                <a:schemeClr val="hlink"/>
-              </a:solidFill>
-              <a:latin typeface="Times New Roman"/>
-              <a:ea typeface="Times New Roman"/>
-              <a:cs typeface="Times New Roman"/>
-              <a:sym typeface="Times New Roman"/>
-            </a:endParaRPr>
-          </a:p>
-        </p:txBody>
-      </p:sp>
-    </p:spTree>
-    <p:extLst>
-      <p:ext uri="{BB962C8B-B14F-4D97-AF65-F5344CB8AC3E}">
-        <p14:creationId xmlns:p14="http://schemas.microsoft.com/office/powerpoint/2010/main" val="577191861"/>
-      </p:ext>
-    </p:extLst>
-  </p:cSld>
-  <p:clrMapOvr>
-    <a:masterClrMapping/>
-  </p:clrMapOvr>
-</p:sld>
-</file>
-
-<file path=ppt/slides/slide8.xml><?xml version="1.0" encoding="utf-8"?>
 <p:sld xmlns:a="http://schemas.openxmlformats.org/drawingml/2006/main" xmlns:r="http://schemas.openxmlformats.org/officeDocument/2006/relationships" xmlns:p="http://schemas.openxmlformats.org/presentationml/2006/main" showMasterSp="0">
   <p:cSld>
     <p:spTree>
@@ -31601,7 +31638,7 @@
             </a:pPr>
             <a:fld id="{00000000-1234-1234-1234-123412341234}" type="slidenum">
               <a:rPr lang="en"/>
-              <a:t>8</a:t>
+              <a:t>6</a:t>
             </a:fld>
             <a:endParaRPr/>
           </a:p>
@@ -32663,7 +32700,7 @@
 </p:sld>
 </file>
 
-<file path=ppt/slides/slide9.xml><?xml version="1.0" encoding="utf-8"?>
+<file path=ppt/slides/slide7.xml><?xml version="1.0" encoding="utf-8"?>
 <p:sld xmlns:a="http://schemas.openxmlformats.org/drawingml/2006/main" xmlns:r="http://schemas.openxmlformats.org/officeDocument/2006/relationships" xmlns:p="http://schemas.openxmlformats.org/presentationml/2006/main" showMasterSp="0">
   <p:cSld>
     <p:spTree>
@@ -32716,7 +32753,7 @@
             </a:pPr>
             <a:fld id="{00000000-1234-1234-1234-123412341234}" type="slidenum">
               <a:rPr lang="en"/>
-              <a:t>9</a:t>
+              <a:t>7</a:t>
             </a:fld>
             <a:endParaRPr/>
           </a:p>
@@ -34055,6 +34092,720 @@
         </p:txBody>
       </p:sp>
     </p:spTree>
+  </p:cSld>
+  <p:clrMapOvr>
+    <a:masterClrMapping/>
+  </p:clrMapOvr>
+</p:sld>
+</file>
+
+<file path=ppt/slides/slide8.xml><?xml version="1.0" encoding="utf-8"?>
+<p:sld xmlns:a="http://schemas.openxmlformats.org/drawingml/2006/main" xmlns:r="http://schemas.openxmlformats.org/officeDocument/2006/relationships" xmlns:p="http://schemas.openxmlformats.org/presentationml/2006/main" showMasterSp="0">
+  <p:cSld>
+    <p:spTree>
+      <p:nvGrpSpPr>
+        <p:cNvPr id="1" name="Shape 298"/>
+        <p:cNvGrpSpPr/>
+        <p:nvPr/>
+      </p:nvGrpSpPr>
+      <p:grpSpPr>
+        <a:xfrm>
+          <a:off x="0" y="0"/>
+          <a:ext cx="0" cy="0"/>
+          <a:chOff x="0" y="0"/>
+          <a:chExt cx="0" cy="0"/>
+        </a:xfrm>
+      </p:grpSpPr>
+      <p:sp>
+        <p:nvSpPr>
+          <p:cNvPr id="299" name="Google Shape;299;p41"/>
+          <p:cNvSpPr txBox="1">
+            <a:spLocks noGrp="1"/>
+          </p:cNvSpPr>
+          <p:nvPr>
+            <p:ph type="sldNum" idx="12"/>
+          </p:nvPr>
+        </p:nvSpPr>
+        <p:spPr>
+          <a:xfrm>
+            <a:off x="8472458" y="4663217"/>
+            <a:ext cx="548700" cy="393600"/>
+          </a:xfrm>
+          <a:prstGeom prst="rect">
+            <a:avLst/>
+          </a:prstGeom>
+        </p:spPr>
+        <p:txBody>
+          <a:bodyPr spcFirstLastPara="1" wrap="square" lIns="91425" tIns="91425" rIns="91425" bIns="91425" anchor="ctr" anchorCtr="0">
+            <a:normAutofit/>
+          </a:bodyPr>
+          <a:lstStyle/>
+          <a:p>
+            <a:pPr marL="0" lvl="0" indent="0" algn="r" rtl="0">
+              <a:spcBef>
+                <a:spcPts val="0"/>
+              </a:spcBef>
+              <a:spcAft>
+                <a:spcPts val="0"/>
+              </a:spcAft>
+              <a:buNone/>
+            </a:pPr>
+            <a:fld id="{00000000-1234-1234-1234-123412341234}" type="slidenum">
+              <a:rPr lang="en"/>
+              <a:t>8</a:t>
+            </a:fld>
+            <a:endParaRPr/>
+          </a:p>
+        </p:txBody>
+      </p:sp>
+      <p:sp>
+        <p:nvSpPr>
+          <p:cNvPr id="300" name="Google Shape;300;p41"/>
+          <p:cNvSpPr txBox="1">
+            <a:spLocks noGrp="1"/>
+          </p:cNvSpPr>
+          <p:nvPr>
+            <p:ph type="body" idx="2"/>
+          </p:nvPr>
+        </p:nvSpPr>
+        <p:spPr>
+          <a:xfrm>
+            <a:off x="6452200" y="196725"/>
+            <a:ext cx="2569200" cy="209100"/>
+          </a:xfrm>
+          <a:prstGeom prst="rect">
+            <a:avLst/>
+          </a:prstGeom>
+        </p:spPr>
+        <p:txBody>
+          <a:bodyPr spcFirstLastPara="1" wrap="square" lIns="91425" tIns="91425" rIns="91425" bIns="91425" anchor="ctr" anchorCtr="0">
+            <a:noAutofit/>
+          </a:bodyPr>
+          <a:lstStyle/>
+          <a:p>
+            <a:pPr marL="0" lvl="0" indent="0" algn="r" rtl="0">
+              <a:spcBef>
+                <a:spcPts val="0"/>
+              </a:spcBef>
+              <a:spcAft>
+                <a:spcPts val="1200"/>
+              </a:spcAft>
+              <a:buNone/>
+            </a:pPr>
+            <a:r>
+              <a:rPr lang="en"/>
+              <a:t>CSYE 7380 - Theory &amp; Prac App AI Gen Model College of Engineering, Northeastern University </a:t>
+            </a:r>
+            <a:endParaRPr/>
+          </a:p>
+        </p:txBody>
+      </p:sp>
+      <p:sp>
+        <p:nvSpPr>
+          <p:cNvPr id="301" name="Google Shape;301;p41"/>
+          <p:cNvSpPr txBox="1"/>
+          <p:nvPr/>
+        </p:nvSpPr>
+        <p:spPr>
+          <a:xfrm>
+            <a:off x="516437" y="744789"/>
+            <a:ext cx="7043700" cy="493800"/>
+          </a:xfrm>
+          <a:prstGeom prst="rect">
+            <a:avLst/>
+          </a:prstGeom>
+          <a:noFill/>
+          <a:ln>
+            <a:noFill/>
+          </a:ln>
+        </p:spPr>
+        <p:txBody>
+          <a:bodyPr spcFirstLastPara="1" wrap="square" lIns="91425" tIns="91425" rIns="91425" bIns="91425" anchor="ctr" anchorCtr="0">
+            <a:noAutofit/>
+          </a:bodyPr>
+          <a:lstStyle/>
+          <a:p>
+            <a:pPr marL="0" lvl="0" indent="0" algn="l" rtl="0">
+              <a:spcBef>
+                <a:spcPts val="0"/>
+              </a:spcBef>
+              <a:spcAft>
+                <a:spcPts val="0"/>
+              </a:spcAft>
+              <a:buNone/>
+            </a:pPr>
+            <a:r>
+              <a:rPr lang="en" sz="2250" b="1" dirty="0">
+                <a:solidFill>
+                  <a:schemeClr val="dk1"/>
+                </a:solidFill>
+                <a:latin typeface="Merriweather"/>
+                <a:ea typeface="Merriweather"/>
+                <a:cs typeface="Merriweather"/>
+                <a:sym typeface="Merriweather"/>
+              </a:rPr>
+              <a:t>Model Interpretation（Machine Learning）</a:t>
+            </a:r>
+            <a:endParaRPr sz="3650" b="1" dirty="0">
+              <a:solidFill>
+                <a:schemeClr val="dk1"/>
+              </a:solidFill>
+              <a:latin typeface="Merriweather"/>
+              <a:ea typeface="Merriweather"/>
+              <a:cs typeface="Merriweather"/>
+              <a:sym typeface="Merriweather"/>
+            </a:endParaRPr>
+          </a:p>
+        </p:txBody>
+      </p:sp>
+      <p:sp>
+        <p:nvSpPr>
+          <p:cNvPr id="302" name="Google Shape;302;p41"/>
+          <p:cNvSpPr txBox="1"/>
+          <p:nvPr/>
+        </p:nvSpPr>
+        <p:spPr>
+          <a:xfrm>
+            <a:off x="516425" y="1370275"/>
+            <a:ext cx="6790500" cy="2726400"/>
+          </a:xfrm>
+          <a:prstGeom prst="rect">
+            <a:avLst/>
+          </a:prstGeom>
+          <a:noFill/>
+          <a:ln>
+            <a:noFill/>
+          </a:ln>
+        </p:spPr>
+        <p:txBody>
+          <a:bodyPr spcFirstLastPara="1" wrap="square" lIns="91425" tIns="91425" rIns="91425" bIns="91425" anchor="t" anchorCtr="0">
+            <a:noAutofit/>
+          </a:bodyPr>
+          <a:lstStyle/>
+          <a:p>
+            <a:pPr marL="0" lvl="0" indent="0" algn="l" rtl="0">
+              <a:lnSpc>
+                <a:spcPct val="115000"/>
+              </a:lnSpc>
+              <a:spcBef>
+                <a:spcPts val="1400"/>
+              </a:spcBef>
+              <a:spcAft>
+                <a:spcPts val="0"/>
+              </a:spcAft>
+              <a:buNone/>
+            </a:pPr>
+            <a:r>
+              <a:rPr lang="en" sz="1300" b="1" dirty="0">
+                <a:solidFill>
+                  <a:schemeClr val="hlink"/>
+                </a:solidFill>
+              </a:rPr>
+              <a:t>🔹 Model Performance</a:t>
+            </a:r>
+            <a:endParaRPr sz="1300" b="1" dirty="0">
+              <a:solidFill>
+                <a:schemeClr val="hlink"/>
+              </a:solidFill>
+            </a:endParaRPr>
+          </a:p>
+          <a:p>
+            <a:pPr marL="457200" lvl="0" indent="-298450" algn="l" rtl="0">
+              <a:lnSpc>
+                <a:spcPct val="115000"/>
+              </a:lnSpc>
+              <a:spcBef>
+                <a:spcPts val="1200"/>
+              </a:spcBef>
+              <a:spcAft>
+                <a:spcPts val="0"/>
+              </a:spcAft>
+              <a:buClr>
+                <a:schemeClr val="hlink"/>
+              </a:buClr>
+              <a:buSzPts val="1100"/>
+              <a:buChar char="●"/>
+            </a:pPr>
+            <a:r>
+              <a:rPr lang="en-US" sz="1100" dirty="0">
+                <a:solidFill>
+                  <a:schemeClr val="hlink"/>
+                </a:solidFill>
+              </a:rPr>
+              <a:t>Removed low-correlation features ( |r| &lt; 0.2)</a:t>
+            </a:r>
+            <a:br>
+              <a:rPr lang="en-US" sz="1100" dirty="0">
+                <a:solidFill>
+                  <a:schemeClr val="hlink"/>
+                </a:solidFill>
+              </a:rPr>
+            </a:br>
+            <a:endParaRPr lang="en-US" sz="1100" dirty="0">
+              <a:solidFill>
+                <a:schemeClr val="hlink"/>
+              </a:solidFill>
+            </a:endParaRPr>
+          </a:p>
+          <a:p>
+            <a:pPr marL="457200" indent="-298450">
+              <a:lnSpc>
+                <a:spcPct val="115000"/>
+              </a:lnSpc>
+              <a:buClr>
+                <a:schemeClr val="hlink"/>
+              </a:buClr>
+              <a:buSzPts val="1100"/>
+              <a:buFont typeface="Arial"/>
+              <a:buChar char="●"/>
+            </a:pPr>
+            <a:r>
+              <a:rPr lang="en-US" altLang="zh-CN" sz="1100" dirty="0">
+                <a:solidFill>
+                  <a:schemeClr val="hlink"/>
+                </a:solidFill>
+              </a:rPr>
+              <a:t>SMOTE enhances recall for minority (diabetic) class</a:t>
+            </a:r>
+          </a:p>
+          <a:p>
+            <a:pPr marL="457200" lvl="0" indent="-298450" algn="l" rtl="0">
+              <a:lnSpc>
+                <a:spcPct val="115000"/>
+              </a:lnSpc>
+              <a:spcBef>
+                <a:spcPts val="0"/>
+              </a:spcBef>
+              <a:spcAft>
+                <a:spcPts val="0"/>
+              </a:spcAft>
+              <a:buClr>
+                <a:schemeClr val="hlink"/>
+              </a:buClr>
+              <a:buSzPts val="1100"/>
+              <a:buChar char="●"/>
+            </a:pPr>
+            <a:endParaRPr lang="en" sz="1100" dirty="0">
+              <a:solidFill>
+                <a:schemeClr val="hlink"/>
+              </a:solidFill>
+            </a:endParaRPr>
+          </a:p>
+          <a:p>
+            <a:pPr marL="457200" lvl="0" indent="-298450" algn="l" rtl="0">
+              <a:lnSpc>
+                <a:spcPct val="115000"/>
+              </a:lnSpc>
+              <a:spcBef>
+                <a:spcPts val="0"/>
+              </a:spcBef>
+              <a:spcAft>
+                <a:spcPts val="0"/>
+              </a:spcAft>
+              <a:buClr>
+                <a:schemeClr val="hlink"/>
+              </a:buClr>
+              <a:buSzPts val="1100"/>
+              <a:buChar char="●"/>
+            </a:pPr>
+            <a:r>
+              <a:rPr lang="en" sz="1100" dirty="0">
+                <a:solidFill>
+                  <a:schemeClr val="hlink"/>
+                </a:solidFill>
+              </a:rPr>
+              <a:t>Ensemble models outperform individual ones in both AUC and AUPR</a:t>
+            </a:r>
+            <a:br>
+              <a:rPr lang="en" sz="1100" dirty="0">
+                <a:solidFill>
+                  <a:schemeClr val="hlink"/>
+                </a:solidFill>
+              </a:rPr>
+            </a:br>
+            <a:endParaRPr sz="1100" dirty="0">
+              <a:solidFill>
+                <a:schemeClr val="hlink"/>
+              </a:solidFill>
+            </a:endParaRPr>
+          </a:p>
+          <a:p>
+            <a:pPr marL="457200" lvl="0" indent="-298450" algn="l" rtl="0">
+              <a:lnSpc>
+                <a:spcPct val="115000"/>
+              </a:lnSpc>
+              <a:spcBef>
+                <a:spcPts val="0"/>
+              </a:spcBef>
+              <a:spcAft>
+                <a:spcPts val="0"/>
+              </a:spcAft>
+              <a:buClr>
+                <a:schemeClr val="hlink"/>
+              </a:buClr>
+              <a:buSzPts val="1100"/>
+              <a:buChar char="●"/>
+            </a:pPr>
+            <a:r>
+              <a:rPr lang="en" sz="1100" dirty="0">
+                <a:solidFill>
+                  <a:schemeClr val="hlink"/>
+                </a:solidFill>
+              </a:rPr>
+              <a:t>Stacking improves prediction stability across folds</a:t>
+            </a:r>
+            <a:br>
+              <a:rPr lang="en" sz="1100" dirty="0">
+                <a:solidFill>
+                  <a:schemeClr val="hlink"/>
+                </a:solidFill>
+              </a:rPr>
+            </a:br>
+            <a:endParaRPr sz="1100" dirty="0">
+              <a:solidFill>
+                <a:schemeClr val="hlink"/>
+              </a:solidFill>
+            </a:endParaRPr>
+          </a:p>
+          <a:p>
+            <a:pPr marL="0" lvl="0" indent="0" algn="l" rtl="0">
+              <a:lnSpc>
+                <a:spcPct val="115000"/>
+              </a:lnSpc>
+              <a:spcBef>
+                <a:spcPts val="1200"/>
+              </a:spcBef>
+              <a:spcAft>
+                <a:spcPts val="1200"/>
+              </a:spcAft>
+              <a:buNone/>
+            </a:pPr>
+            <a:endParaRPr sz="1300" b="1" dirty="0">
+              <a:solidFill>
+                <a:schemeClr val="hlink"/>
+              </a:solidFill>
+            </a:endParaRPr>
+          </a:p>
+        </p:txBody>
+      </p:sp>
+    </p:spTree>
+  </p:cSld>
+  <p:clrMapOvr>
+    <a:masterClrMapping/>
+  </p:clrMapOvr>
+</p:sld>
+</file>
+
+<file path=ppt/slides/slide9.xml><?xml version="1.0" encoding="utf-8"?>
+<p:sld xmlns:a="http://schemas.openxmlformats.org/drawingml/2006/main" xmlns:r="http://schemas.openxmlformats.org/officeDocument/2006/relationships" xmlns:p="http://schemas.openxmlformats.org/presentationml/2006/main">
+  <p:cSld>
+    <p:spTree>
+      <p:nvGrpSpPr>
+        <p:cNvPr id="1" name="Shape 298">
+          <a:extLst>
+            <a:ext uri="{FF2B5EF4-FFF2-40B4-BE49-F238E27FC236}">
+              <a16:creationId xmlns:a16="http://schemas.microsoft.com/office/drawing/2014/main" id="{6FB0F3B4-1FA0-3DA5-9AC8-A6AA1B1EE2F8}"/>
+            </a:ext>
+          </a:extLst>
+        </p:cNvPr>
+        <p:cNvGrpSpPr/>
+        <p:nvPr/>
+      </p:nvGrpSpPr>
+      <p:grpSpPr>
+        <a:xfrm>
+          <a:off x="0" y="0"/>
+          <a:ext cx="0" cy="0"/>
+          <a:chOff x="0" y="0"/>
+          <a:chExt cx="0" cy="0"/>
+        </a:xfrm>
+      </p:grpSpPr>
+      <p:sp>
+        <p:nvSpPr>
+          <p:cNvPr id="299" name="Google Shape;299;p41">
+            <a:extLst>
+              <a:ext uri="{FF2B5EF4-FFF2-40B4-BE49-F238E27FC236}">
+                <a16:creationId xmlns:a16="http://schemas.microsoft.com/office/drawing/2014/main" id="{4F0C1E06-63D3-723A-A46B-A9F13329982B}"/>
+              </a:ext>
+            </a:extLst>
+          </p:cNvPr>
+          <p:cNvSpPr txBox="1">
+            <a:spLocks noGrp="1"/>
+          </p:cNvSpPr>
+          <p:nvPr>
+            <p:ph type="sldNum" idx="12"/>
+          </p:nvPr>
+        </p:nvSpPr>
+        <p:spPr>
+          <a:xfrm>
+            <a:off x="8472458" y="4663217"/>
+            <a:ext cx="548700" cy="393600"/>
+          </a:xfrm>
+          <a:prstGeom prst="rect">
+            <a:avLst/>
+          </a:prstGeom>
+        </p:spPr>
+        <p:txBody>
+          <a:bodyPr spcFirstLastPara="1" wrap="square" lIns="91425" tIns="91425" rIns="91425" bIns="91425" anchor="ctr" anchorCtr="0">
+            <a:normAutofit/>
+          </a:bodyPr>
+          <a:lstStyle/>
+          <a:p>
+            <a:pPr marL="0" lvl="0" indent="0" algn="r" rtl="0">
+              <a:spcBef>
+                <a:spcPts val="0"/>
+              </a:spcBef>
+              <a:spcAft>
+                <a:spcPts val="0"/>
+              </a:spcAft>
+              <a:buNone/>
+            </a:pPr>
+            <a:fld id="{00000000-1234-1234-1234-123412341234}" type="slidenum">
+              <a:rPr lang="en"/>
+              <a:t>9</a:t>
+            </a:fld>
+            <a:endParaRPr/>
+          </a:p>
+        </p:txBody>
+      </p:sp>
+      <p:sp>
+        <p:nvSpPr>
+          <p:cNvPr id="300" name="Google Shape;300;p41">
+            <a:extLst>
+              <a:ext uri="{FF2B5EF4-FFF2-40B4-BE49-F238E27FC236}">
+                <a16:creationId xmlns:a16="http://schemas.microsoft.com/office/drawing/2014/main" id="{2DD80AC5-09CC-33DA-A394-0B13DA0CCA65}"/>
+              </a:ext>
+            </a:extLst>
+          </p:cNvPr>
+          <p:cNvSpPr txBox="1">
+            <a:spLocks noGrp="1"/>
+          </p:cNvSpPr>
+          <p:nvPr>
+            <p:ph type="body" idx="2"/>
+          </p:nvPr>
+        </p:nvSpPr>
+        <p:spPr>
+          <a:xfrm>
+            <a:off x="6452200" y="196725"/>
+            <a:ext cx="2569200" cy="209100"/>
+          </a:xfrm>
+          <a:prstGeom prst="rect">
+            <a:avLst/>
+          </a:prstGeom>
+        </p:spPr>
+        <p:txBody>
+          <a:bodyPr spcFirstLastPara="1" wrap="square" lIns="91425" tIns="91425" rIns="91425" bIns="91425" anchor="ctr" anchorCtr="0">
+            <a:noAutofit/>
+          </a:bodyPr>
+          <a:lstStyle/>
+          <a:p>
+            <a:pPr marL="0" lvl="0" indent="0" algn="r" rtl="0">
+              <a:spcBef>
+                <a:spcPts val="0"/>
+              </a:spcBef>
+              <a:spcAft>
+                <a:spcPts val="1200"/>
+              </a:spcAft>
+              <a:buNone/>
+            </a:pPr>
+            <a:r>
+              <a:rPr lang="en"/>
+              <a:t>CSYE 7380 - Theory &amp; Prac App AI Gen Model College of Engineering, Northeastern University </a:t>
+            </a:r>
+            <a:endParaRPr/>
+          </a:p>
+        </p:txBody>
+      </p:sp>
+      <p:sp>
+        <p:nvSpPr>
+          <p:cNvPr id="301" name="Google Shape;301;p41">
+            <a:extLst>
+              <a:ext uri="{FF2B5EF4-FFF2-40B4-BE49-F238E27FC236}">
+                <a16:creationId xmlns:a16="http://schemas.microsoft.com/office/drawing/2014/main" id="{8FE477B1-21D2-E748-18AB-49D39799BB11}"/>
+              </a:ext>
+            </a:extLst>
+          </p:cNvPr>
+          <p:cNvSpPr txBox="1"/>
+          <p:nvPr/>
+        </p:nvSpPr>
+        <p:spPr>
+          <a:xfrm>
+            <a:off x="516436" y="744789"/>
+            <a:ext cx="7306231" cy="493800"/>
+          </a:xfrm>
+          <a:prstGeom prst="rect">
+            <a:avLst/>
+          </a:prstGeom>
+          <a:noFill/>
+          <a:ln>
+            <a:noFill/>
+          </a:ln>
+        </p:spPr>
+        <p:txBody>
+          <a:bodyPr spcFirstLastPara="1" wrap="square" lIns="91425" tIns="91425" rIns="91425" bIns="91425" anchor="ctr" anchorCtr="0">
+            <a:noAutofit/>
+          </a:bodyPr>
+          <a:lstStyle/>
+          <a:p>
+            <a:pPr marL="0" lvl="0" indent="0" algn="l" rtl="0">
+              <a:spcBef>
+                <a:spcPts val="0"/>
+              </a:spcBef>
+              <a:spcAft>
+                <a:spcPts val="0"/>
+              </a:spcAft>
+              <a:buNone/>
+            </a:pPr>
+            <a:r>
+              <a:rPr lang="en" sz="2250" b="1" dirty="0">
+                <a:solidFill>
+                  <a:schemeClr val="dk1"/>
+                </a:solidFill>
+                <a:latin typeface="Merriweather"/>
+                <a:ea typeface="Merriweather"/>
+                <a:cs typeface="Merriweather"/>
+                <a:sym typeface="Merriweather"/>
+              </a:rPr>
+              <a:t>Model Interpretation（</a:t>
+            </a:r>
+            <a:r>
+              <a:rPr lang="en-US" sz="2250" b="1" dirty="0">
+                <a:solidFill>
+                  <a:schemeClr val="dk1"/>
+                </a:solidFill>
+                <a:latin typeface="Merriweather"/>
+                <a:ea typeface="Merriweather"/>
+                <a:cs typeface="Merriweather"/>
+                <a:sym typeface="Merriweather"/>
+              </a:rPr>
+              <a:t>Removed low-correlation features</a:t>
+            </a:r>
+            <a:r>
+              <a:rPr lang="en" sz="2250" b="1" dirty="0">
+                <a:solidFill>
+                  <a:schemeClr val="dk1"/>
+                </a:solidFill>
+                <a:latin typeface="Merriweather"/>
+                <a:ea typeface="Merriweather"/>
+                <a:cs typeface="Merriweather"/>
+                <a:sym typeface="Merriweather"/>
+              </a:rPr>
+              <a:t>）</a:t>
+            </a:r>
+            <a:endParaRPr sz="3650" b="1" dirty="0">
+              <a:solidFill>
+                <a:schemeClr val="dk1"/>
+              </a:solidFill>
+              <a:latin typeface="Merriweather"/>
+              <a:ea typeface="Merriweather"/>
+              <a:cs typeface="Merriweather"/>
+              <a:sym typeface="Merriweather"/>
+            </a:endParaRPr>
+          </a:p>
+        </p:txBody>
+      </p:sp>
+      <p:sp>
+        <p:nvSpPr>
+          <p:cNvPr id="302" name="Google Shape;302;p41">
+            <a:extLst>
+              <a:ext uri="{FF2B5EF4-FFF2-40B4-BE49-F238E27FC236}">
+                <a16:creationId xmlns:a16="http://schemas.microsoft.com/office/drawing/2014/main" id="{E34BE26A-B6CC-C209-90D7-15BB5AA354AC}"/>
+              </a:ext>
+            </a:extLst>
+          </p:cNvPr>
+          <p:cNvSpPr txBox="1"/>
+          <p:nvPr/>
+        </p:nvSpPr>
+        <p:spPr>
+          <a:xfrm>
+            <a:off x="516425" y="1370275"/>
+            <a:ext cx="6790500" cy="2726400"/>
+          </a:xfrm>
+          <a:prstGeom prst="rect">
+            <a:avLst/>
+          </a:prstGeom>
+          <a:noFill/>
+          <a:ln>
+            <a:noFill/>
+          </a:ln>
+        </p:spPr>
+        <p:txBody>
+          <a:bodyPr spcFirstLastPara="1" wrap="square" lIns="91425" tIns="91425" rIns="91425" bIns="91425" anchor="t" anchorCtr="0">
+            <a:noAutofit/>
+          </a:bodyPr>
+          <a:lstStyle/>
+          <a:p>
+            <a:pPr marL="0" lvl="0" indent="0" algn="l" rtl="0">
+              <a:lnSpc>
+                <a:spcPct val="115000"/>
+              </a:lnSpc>
+              <a:spcBef>
+                <a:spcPts val="1400"/>
+              </a:spcBef>
+              <a:spcAft>
+                <a:spcPts val="0"/>
+              </a:spcAft>
+              <a:buNone/>
+            </a:pPr>
+            <a:r>
+              <a:rPr lang="en" sz="1300" b="1" dirty="0">
+                <a:solidFill>
+                  <a:schemeClr val="hlink"/>
+                </a:solidFill>
+              </a:rPr>
+              <a:t>🔹 </a:t>
+            </a:r>
+            <a:r>
+              <a:rPr lang="en" altLang="zh-CN" sz="1400" dirty="0">
+                <a:solidFill>
+                  <a:schemeClr val="hlink"/>
+                </a:solidFill>
+              </a:rPr>
+              <a:t>Removed low-correlation features ( |r| &lt; 0.2)</a:t>
+            </a:r>
+            <a:endParaRPr sz="1300" b="1" dirty="0">
+              <a:solidFill>
+                <a:schemeClr val="hlink"/>
+              </a:solidFill>
+            </a:endParaRPr>
+          </a:p>
+        </p:txBody>
+      </p:sp>
+      <p:pic>
+        <p:nvPicPr>
+          <p:cNvPr id="3" name="Picture 2">
+            <a:extLst>
+              <a:ext uri="{FF2B5EF4-FFF2-40B4-BE49-F238E27FC236}">
+                <a16:creationId xmlns:a16="http://schemas.microsoft.com/office/drawing/2014/main" id="{1B4D12B3-FFFB-5345-D669-A33188F16F43}"/>
+              </a:ext>
+            </a:extLst>
+          </p:cNvPr>
+          <p:cNvPicPr>
+            <a:picLocks noChangeAspect="1"/>
+          </p:cNvPicPr>
+          <p:nvPr/>
+        </p:nvPicPr>
+        <p:blipFill>
+          <a:blip r:embed="rId3"/>
+          <a:stretch>
+            <a:fillRect/>
+          </a:stretch>
+        </p:blipFill>
+        <p:spPr>
+          <a:xfrm>
+            <a:off x="791931" y="2419356"/>
+            <a:ext cx="7560137" cy="1979355"/>
+          </a:xfrm>
+          <a:prstGeom prst="rect">
+            <a:avLst/>
+          </a:prstGeom>
+        </p:spPr>
+      </p:pic>
+    </p:spTree>
+    <p:extLst>
+      <p:ext uri="{BB962C8B-B14F-4D97-AF65-F5344CB8AC3E}">
+        <p14:creationId xmlns:p14="http://schemas.microsoft.com/office/powerpoint/2010/main" val="1200494164"/>
+      </p:ext>
+    </p:extLst>
   </p:cSld>
   <p:clrMapOvr>
     <a:masterClrMapping/>
